--- a/livrables/P11_FashionInsta_Partie2_Etape3_Couts_ROI.pptx
+++ b/livrables/P11_FashionInsta_Partie2_Etape3_Couts_ROI.pptx
@@ -26,6 +26,8 @@
     <p:sldId id="275" r:id="rId26"/>
     <p:sldId id="276" r:id="rId27"/>
     <p:sldId id="277" r:id="rId28"/>
+    <p:sldId id="279" r:id="rId30"/>
+    <p:sldId id="280" r:id="rId31"/>
     <p:sldId id="269" r:id="rId15"/>
   </p:sldIdLst>
   <p:notesMasterIdLst>
@@ -1199,76 +1201,6 @@
           <a:p>
             <a:r>
               <a:t>Les taux affichés correspondent à la charge moyenne par personne et par phase. Les sept collaborateurs n’interviennent pas tous à temps plein. Le Copil réunit Alicia, représentants métiers, Tech Lead et décideurs, tandis que le Coproj hebdomadaire est opérationnel. Les cérémonies S3/S8/S13/S17 incluent une validation de la pertinence métier.</a:t>
-            </a:r>
-          </a:p>
-        </p:txBody>
-      </p:sp>
-      <p:sp>
-        <p:nvSpPr>
-          <p:cNvPr id="4" name="Slide Number Placeholder 3"/>
-          <p:cNvSpPr>
-            <a:spLocks noGrp="1"/>
-          </p:cNvSpPr>
-          <p:nvPr>
-            <p:ph type="sldNum" idx="5" sz="quarter"/>
-          </p:nvPr>
-        </p:nvSpPr>
-        <p:spPr/>
-      </p:sp>
-    </p:spTree>
-  </p:cSld>
-  <p:clrMapOvr>
-    <a:masterClrMapping/>
-  </p:clrMapOvr>
-</p:notes>
-</file>
-
-<file path=ppt/notesSlides/notesSlide18.xml><?xml version="1.0" encoding="utf-8"?>
-<p:notes xmlns:a="http://schemas.openxmlformats.org/drawingml/2006/main" xmlns:p="http://schemas.openxmlformats.org/presentationml/2006/main" xmlns:r="http://schemas.openxmlformats.org/officeDocument/2006/relationships">
-  <p:cSld>
-    <p:spTree>
-      <p:nvGrpSpPr>
-        <p:cNvPr id="1" name=""/>
-        <p:cNvGrpSpPr/>
-        <p:nvPr/>
-      </p:nvGrpSpPr>
-      <p:grpSpPr>
-        <a:xfrm>
-          <a:off x="0" y="0"/>
-          <a:ext cx="0" cy="0"/>
-          <a:chOff x="0" y="0"/>
-          <a:chExt cx="0" cy="0"/>
-        </a:xfrm>
-      </p:grpSpPr>
-      <p:sp>
-        <p:nvSpPr>
-          <p:cNvPr id="2" name="Slide Image Placeholder 1"/>
-          <p:cNvSpPr>
-            <a:spLocks noGrp="1"/>
-          </p:cNvSpPr>
-          <p:nvPr>
-            <p:ph type="sldImg" idx="2"/>
-          </p:nvPr>
-        </p:nvSpPr>
-        <p:spPr/>
-      </p:sp>
-      <p:sp>
-        <p:nvSpPr>
-          <p:cNvPr id="3" name="Notes Placeholder 2"/>
-          <p:cNvSpPr>
-            <a:spLocks noGrp="1"/>
-          </p:cNvSpPr>
-          <p:nvPr>
-            <p:ph type="body" idx="3" sz="quarter"/>
-          </p:nvPr>
-        </p:nvSpPr>
-        <p:spPr/>
-        <p:txBody>
-          <a:bodyPr/>
-          <a:lstStyle/>
-          <a:p>
-            <a:r>
-              <a:t>Tarifs officiels Fashion-Insta (coût salarial/jour) : Data Scientist 350 €, Data Engineer 370 €, Tech Lead 400 €, MLOps 360 €. Charge 30/180/36 JH. Budget 89 360 € + provision Azure lancement 3 600 € = 92 960 €. Les 4 semaines Run initial sont déjà incluses ; éviter le double comptage.</a:t>
             </a:r>
           </a:p>
         </p:txBody>
@@ -21071,7 +21003,7 @@
                 </a:solidFill>
                 <a:latin typeface="Aptos"/>
               </a:rPr>
-              <a:t>One-shot par phase · Run par nature de coût</a:t>
+              <a:t>Lancement par phase · Run récurrent ventilé</a:t>
             </a:r>
           </a:p>
         </p:txBody>
@@ -22553,7 +22485,7 @@
                 </a:solidFill>
                 <a:latin typeface="Aptos"/>
               </a:rPr>
-              <a:t>One-shot = PoC + MVP + 4 semaines de Run initial ; aucune double imputation des semaines 14–17.</a:t>
+              <a:t>Lancement = PoC + MVP + Run initial (17 sem.) ; puis Run récurrent, sans double comptage.</a:t>
             </a:r>
           </a:p>
         </p:txBody>
@@ -29667,7 +29599,7 @@
                 </a:solidFill>
                 <a:latin typeface="Aptos"/>
               </a:rPr>
-              <a:t>22</a:t>
+              <a:t>24</a:t>
             </a:r>
           </a:p>
         </p:txBody>
@@ -30193,6 +30125,3981 @@
               <a:t>Azure AI Search : https://learn.microsoft.com/fr-fr/azure/search/vector-search-how-to-query</a:t>
             </a:r>
             <a:endParaRPr lang="en-US" sz="970" dirty="0"/>
+          </a:p>
+        </p:txBody>
+      </p:sp>
+    </p:spTree>
+  </p:cSld>
+  <p:clrMapOvr>
+    <a:masterClrMapping/>
+  </p:clrMapOvr>
+</p:sld>
+</file>
+
+<file path=ppt/slides/slide23.xml><?xml version="1.0" encoding="utf-8"?>
+<p:sld xmlns:a="http://schemas.openxmlformats.org/drawingml/2006/main" xmlns:p="http://schemas.openxmlformats.org/presentationml/2006/main" xmlns:r="http://schemas.openxmlformats.org/officeDocument/2006/relationships">
+  <p:cSld>
+    <p:spTree>
+      <p:nvGrpSpPr>
+        <p:cNvPr id="1" name=""/>
+        <p:cNvGrpSpPr/>
+        <p:nvPr/>
+      </p:nvGrpSpPr>
+      <p:grpSpPr/>
+      <p:sp>
+        <p:nvSpPr>
+          <p:cNvPr id="2" name="Rectangle 1"/>
+          <p:cNvSpPr/>
+          <p:nvPr/>
+        </p:nvSpPr>
+        <p:spPr>
+          <a:xfrm>
+            <a:off x="0" y="0"/>
+            <a:ext cx="12191695" cy="6858000"/>
+          </a:xfrm>
+          <a:prstGeom prst="rect">
+            <a:avLst/>
+          </a:prstGeom>
+          <a:solidFill>
+            <a:srgbClr val="FFFFFF"/>
+          </a:solidFill>
+          <a:ln>
+            <a:noFill/>
+          </a:ln>
+        </p:spPr>
+        <p:style>
+          <a:lnRef idx="1">
+            <a:schemeClr val="accent1"/>
+          </a:lnRef>
+          <a:fillRef idx="3">
+            <a:schemeClr val="accent1"/>
+          </a:fillRef>
+          <a:effectRef idx="2">
+            <a:schemeClr val="accent1"/>
+          </a:effectRef>
+          <a:fontRef idx="minor">
+            <a:schemeClr val="lt1"/>
+          </a:fontRef>
+        </p:style>
+        <p:txBody>
+          <a:bodyPr rtlCol="0" anchor="ctr"/>
+          <a:lstStyle/>
+          <a:p>
+            <a:pPr algn="ctr"/>
+          </a:p>
+        </p:txBody>
+      </p:sp>
+      <p:sp>
+        <p:nvSpPr>
+          <p:cNvPr id="3" name="TextBox 2"/>
+          <p:cNvSpPr txBox="1"/>
+          <p:nvPr/>
+        </p:nvSpPr>
+        <p:spPr>
+          <a:xfrm>
+            <a:off x="603504" y="256032"/>
+            <a:ext cx="10972800" cy="201168"/>
+          </a:xfrm>
+          <a:prstGeom prst="rect">
+            <a:avLst/>
+          </a:prstGeom>
+          <a:noFill/>
+        </p:spPr>
+        <p:txBody>
+          <a:bodyPr wrap="square" lIns="18288" rIns="18288" tIns="9144" bIns="0">
+            <a:spAutoFit/>
+          </a:bodyPr>
+          <a:lstStyle/>
+          <a:p>
+            <a:pPr>
+              <a:defRPr sz="1010" b="1">
+                <a:solidFill>
+                  <a:srgbClr val="607069"/>
+                </a:solidFill>
+                <a:latin typeface="Inter"/>
+              </a:defRPr>
+            </a:pPr>
+            <a:r>
+              <a:t>20  /  DONNÉES SOURCE ET CATALOGUE</a:t>
+            </a:r>
+          </a:p>
+        </p:txBody>
+      </p:sp>
+      <p:sp>
+        <p:nvSpPr>
+          <p:cNvPr id="4" name="TextBox 3"/>
+          <p:cNvSpPr txBox="1"/>
+          <p:nvPr/>
+        </p:nvSpPr>
+        <p:spPr>
+          <a:xfrm>
+            <a:off x="603504" y="658368"/>
+            <a:ext cx="10972800" cy="548640"/>
+          </a:xfrm>
+          <a:prstGeom prst="rect">
+            <a:avLst/>
+          </a:prstGeom>
+          <a:noFill/>
+        </p:spPr>
+        <p:txBody>
+          <a:bodyPr wrap="square" lIns="18288" rIns="18288" tIns="9144" bIns="0">
+            <a:spAutoFit/>
+          </a:bodyPr>
+          <a:lstStyle/>
+          <a:p>
+            <a:pPr>
+              <a:defRPr sz="2900" b="1">
+                <a:solidFill>
+                  <a:srgbClr val="17221F"/>
+                </a:solidFill>
+                <a:latin typeface="Inter Display"/>
+              </a:defRPr>
+            </a:pPr>
+            <a:r>
+              <a:t>Un catalogue de 875 références en neuf catégories</a:t>
+            </a:r>
+          </a:p>
+        </p:txBody>
+      </p:sp>
+      <p:sp>
+        <p:nvSpPr>
+          <p:cNvPr id="5" name="TextBox 4"/>
+          <p:cNvSpPr txBox="1"/>
+          <p:nvPr/>
+        </p:nvSpPr>
+        <p:spPr>
+          <a:xfrm>
+            <a:off x="630936" y="1307592"/>
+            <a:ext cx="10972800" cy="384048"/>
+          </a:xfrm>
+          <a:prstGeom prst="rect">
+            <a:avLst/>
+          </a:prstGeom>
+          <a:noFill/>
+        </p:spPr>
+        <p:txBody>
+          <a:bodyPr wrap="square" lIns="18288" rIns="18288" tIns="9144" bIns="0">
+            <a:spAutoFit/>
+          </a:bodyPr>
+          <a:lstStyle/>
+          <a:p>
+            <a:pPr>
+              <a:defRPr sz="1300" b="0">
+                <a:solidFill>
+                  <a:srgbClr val="607069"/>
+                </a:solidFill>
+                <a:latin typeface="Inter"/>
+              </a:defRPr>
+            </a:pPr>
+            <a:r>
+              <a:t>Répartition 2024 communiquée par Alicia ; chiffres source à confirmer avant exploitation.</a:t>
+            </a:r>
+          </a:p>
+        </p:txBody>
+      </p:sp>
+      <p:sp>
+        <p:nvSpPr>
+          <p:cNvPr id="6" name="Rectangle 5"/>
+          <p:cNvSpPr/>
+          <p:nvPr/>
+        </p:nvSpPr>
+        <p:spPr>
+          <a:xfrm>
+            <a:off x="594360" y="6437376"/>
+            <a:ext cx="11018520" cy="13716"/>
+          </a:xfrm>
+          <a:prstGeom prst="rect">
+            <a:avLst/>
+          </a:prstGeom>
+          <a:solidFill>
+            <a:srgbClr val="E1E8E2"/>
+          </a:solidFill>
+          <a:ln>
+            <a:noFill/>
+          </a:ln>
+        </p:spPr>
+        <p:style>
+          <a:lnRef idx="1">
+            <a:schemeClr val="accent1"/>
+          </a:lnRef>
+          <a:fillRef idx="3">
+            <a:schemeClr val="accent1"/>
+          </a:fillRef>
+          <a:effectRef idx="2">
+            <a:schemeClr val="accent1"/>
+          </a:effectRef>
+          <a:fontRef idx="minor">
+            <a:schemeClr val="lt1"/>
+          </a:fontRef>
+        </p:style>
+        <p:txBody>
+          <a:bodyPr rtlCol="0" anchor="ctr"/>
+          <a:lstStyle/>
+          <a:p>
+            <a:pPr algn="ctr"/>
+          </a:p>
+        </p:txBody>
+      </p:sp>
+      <p:sp>
+        <p:nvSpPr>
+          <p:cNvPr id="7" name="TextBox 6"/>
+          <p:cNvSpPr txBox="1"/>
+          <p:nvPr/>
+        </p:nvSpPr>
+        <p:spPr>
+          <a:xfrm>
+            <a:off x="594360" y="6492240"/>
+            <a:ext cx="10058400" cy="155448"/>
+          </a:xfrm>
+          <a:prstGeom prst="rect">
+            <a:avLst/>
+          </a:prstGeom>
+          <a:noFill/>
+        </p:spPr>
+        <p:txBody>
+          <a:bodyPr wrap="square" lIns="18288" rIns="18288" tIns="9144" bIns="0">
+            <a:spAutoFit/>
+          </a:bodyPr>
+          <a:lstStyle/>
+          <a:p>
+            <a:pPr>
+              <a:defRPr sz="819" b="0">
+                <a:solidFill>
+                  <a:srgbClr val="607069"/>
+                </a:solidFill>
+                <a:latin typeface="Inter"/>
+              </a:defRPr>
+            </a:pPr>
+            <a:r>
+              <a:t>FASHION–INSTA  ·  BESOINS MÉTIER  /  TRAÇABILITÉ</a:t>
+            </a:r>
+          </a:p>
+        </p:txBody>
+      </p:sp>
+      <p:sp>
+        <p:nvSpPr>
+          <p:cNvPr id="8" name="TextBox 7"/>
+          <p:cNvSpPr txBox="1"/>
+          <p:nvPr/>
+        </p:nvSpPr>
+        <p:spPr>
+          <a:xfrm>
+            <a:off x="11091672" y="6464808"/>
+            <a:ext cx="457200" cy="182880"/>
+          </a:xfrm>
+          <a:prstGeom prst="rect">
+            <a:avLst/>
+          </a:prstGeom>
+          <a:noFill/>
+        </p:spPr>
+        <p:txBody>
+          <a:bodyPr wrap="square" lIns="18288" rIns="18288" tIns="9144" bIns="0">
+            <a:spAutoFit/>
+          </a:bodyPr>
+          <a:lstStyle/>
+          <a:p>
+            <a:pPr>
+              <a:defRPr sz="900" b="0">
+                <a:solidFill>
+                  <a:srgbClr val="607069"/>
+                </a:solidFill>
+                <a:latin typeface="Inter"/>
+              </a:defRPr>
+            </a:pPr>
+            <a:r>
+              <a:t>22</a:t>
+            </a:r>
+          </a:p>
+        </p:txBody>
+      </p:sp>
+      <p:sp>
+        <p:nvSpPr>
+          <p:cNvPr id="9" name="Rounded Rectangle 8"/>
+          <p:cNvSpPr/>
+          <p:nvPr/>
+        </p:nvSpPr>
+        <p:spPr>
+          <a:xfrm>
+            <a:off x="658368" y="1874519"/>
+            <a:ext cx="6556248" cy="4261104"/>
+          </a:xfrm>
+          <a:prstGeom prst="roundRect">
+            <a:avLst/>
+          </a:prstGeom>
+          <a:solidFill>
+            <a:srgbClr val="EFF7E9"/>
+          </a:solidFill>
+          <a:ln>
+            <a:noFill/>
+          </a:ln>
+        </p:spPr>
+        <p:style>
+          <a:lnRef idx="1">
+            <a:schemeClr val="accent1"/>
+          </a:lnRef>
+          <a:fillRef idx="3">
+            <a:schemeClr val="accent1"/>
+          </a:fillRef>
+          <a:effectRef idx="2">
+            <a:schemeClr val="accent1"/>
+          </a:effectRef>
+          <a:fontRef idx="minor">
+            <a:schemeClr val="lt1"/>
+          </a:fontRef>
+        </p:style>
+        <p:txBody>
+          <a:bodyPr rtlCol="0" anchor="ctr"/>
+          <a:lstStyle/>
+          <a:p>
+            <a:pPr algn="ctr"/>
+          </a:p>
+        </p:txBody>
+      </p:sp>
+      <p:sp>
+        <p:nvSpPr>
+          <p:cNvPr id="10" name="TextBox 9"/>
+          <p:cNvSpPr txBox="1"/>
+          <p:nvPr/>
+        </p:nvSpPr>
+        <p:spPr>
+          <a:xfrm>
+            <a:off x="868680" y="2002536"/>
+            <a:ext cx="6126480" cy="265176"/>
+          </a:xfrm>
+          <a:prstGeom prst="rect">
+            <a:avLst/>
+          </a:prstGeom>
+          <a:noFill/>
+        </p:spPr>
+        <p:txBody>
+          <a:bodyPr wrap="square" lIns="18288" rIns="18288" tIns="9144" bIns="0">
+            <a:spAutoFit/>
+          </a:bodyPr>
+          <a:lstStyle/>
+          <a:p>
+            <a:pPr>
+              <a:defRPr sz="1210" b="1">
+                <a:solidFill>
+                  <a:srgbClr val="17221F"/>
+                </a:solidFill>
+                <a:latin typeface="Inter"/>
+              </a:defRPr>
+            </a:pPr>
+            <a:r>
+              <a:t>CATÉGORIES / CA / RÉFÉRENCES</a:t>
+            </a:r>
+          </a:p>
+        </p:txBody>
+      </p:sp>
+      <p:sp>
+        <p:nvSpPr>
+          <p:cNvPr id="11" name="TextBox 10"/>
+          <p:cNvSpPr txBox="1"/>
+          <p:nvPr/>
+        </p:nvSpPr>
+        <p:spPr>
+          <a:xfrm>
+            <a:off x="886968" y="2377440"/>
+            <a:ext cx="3310128" cy="265176"/>
+          </a:xfrm>
+          <a:prstGeom prst="rect">
+            <a:avLst/>
+          </a:prstGeom>
+          <a:noFill/>
+        </p:spPr>
+        <p:txBody>
+          <a:bodyPr wrap="square" lIns="18288" rIns="18288" tIns="9144" bIns="0">
+            <a:spAutoFit/>
+          </a:bodyPr>
+          <a:lstStyle/>
+          <a:p>
+            <a:pPr>
+              <a:defRPr sz="1170" b="1">
+                <a:solidFill>
+                  <a:srgbClr val="17221F"/>
+                </a:solidFill>
+                <a:latin typeface="Inter"/>
+              </a:defRPr>
+            </a:pPr>
+            <a:r>
+              <a:t>Pantalons &amp; jeans</a:t>
+            </a:r>
+          </a:p>
+        </p:txBody>
+      </p:sp>
+      <p:sp>
+        <p:nvSpPr>
+          <p:cNvPr id="12" name="TextBox 11"/>
+          <p:cNvSpPr txBox="1"/>
+          <p:nvPr/>
+        </p:nvSpPr>
+        <p:spPr>
+          <a:xfrm>
+            <a:off x="4315968" y="2377440"/>
+            <a:ext cx="1124712" cy="265176"/>
+          </a:xfrm>
+          <a:prstGeom prst="rect">
+            <a:avLst/>
+          </a:prstGeom>
+          <a:noFill/>
+        </p:spPr>
+        <p:txBody>
+          <a:bodyPr wrap="square" lIns="18288" rIns="18288" tIns="9144" bIns="0">
+            <a:spAutoFit/>
+          </a:bodyPr>
+          <a:lstStyle/>
+          <a:p>
+            <a:pPr algn="r">
+              <a:defRPr sz="1170" b="1">
+                <a:solidFill>
+                  <a:srgbClr val="17221F"/>
+                </a:solidFill>
+                <a:latin typeface="Inter"/>
+              </a:defRPr>
+            </a:pPr>
+            <a:r>
+              <a:t>2,8 M€</a:t>
+            </a:r>
+          </a:p>
+        </p:txBody>
+      </p:sp>
+      <p:sp>
+        <p:nvSpPr>
+          <p:cNvPr id="13" name="TextBox 12"/>
+          <p:cNvSpPr txBox="1"/>
+          <p:nvPr/>
+        </p:nvSpPr>
+        <p:spPr>
+          <a:xfrm>
+            <a:off x="5614416" y="2377440"/>
+            <a:ext cx="832104" cy="265176"/>
+          </a:xfrm>
+          <a:prstGeom prst="rect">
+            <a:avLst/>
+          </a:prstGeom>
+          <a:noFill/>
+        </p:spPr>
+        <p:txBody>
+          <a:bodyPr wrap="square" lIns="18288" rIns="18288" tIns="9144" bIns="0">
+            <a:spAutoFit/>
+          </a:bodyPr>
+          <a:lstStyle/>
+          <a:p>
+            <a:pPr algn="r">
+              <a:defRPr sz="1170" b="1">
+                <a:solidFill>
+                  <a:srgbClr val="17221F"/>
+                </a:solidFill>
+                <a:latin typeface="Inter"/>
+              </a:defRPr>
+            </a:pPr>
+            <a:r>
+              <a:t>120</a:t>
+            </a:r>
+          </a:p>
+        </p:txBody>
+      </p:sp>
+      <p:sp>
+        <p:nvSpPr>
+          <p:cNvPr id="14" name="Rectangle 13"/>
+          <p:cNvSpPr/>
+          <p:nvPr/>
+        </p:nvSpPr>
+        <p:spPr>
+          <a:xfrm>
+            <a:off x="896112" y="2679192"/>
+            <a:ext cx="6172200" cy="7315"/>
+          </a:xfrm>
+          <a:prstGeom prst="rect">
+            <a:avLst/>
+          </a:prstGeom>
+          <a:solidFill>
+            <a:srgbClr val="DAE5D8"/>
+          </a:solidFill>
+          <a:ln>
+            <a:noFill/>
+          </a:ln>
+        </p:spPr>
+        <p:style>
+          <a:lnRef idx="1">
+            <a:schemeClr val="accent1"/>
+          </a:lnRef>
+          <a:fillRef idx="3">
+            <a:schemeClr val="accent1"/>
+          </a:fillRef>
+          <a:effectRef idx="2">
+            <a:schemeClr val="accent1"/>
+          </a:effectRef>
+          <a:fontRef idx="minor">
+            <a:schemeClr val="lt1"/>
+          </a:fontRef>
+        </p:style>
+        <p:txBody>
+          <a:bodyPr rtlCol="0" anchor="ctr"/>
+          <a:lstStyle/>
+          <a:p>
+            <a:pPr algn="ctr"/>
+          </a:p>
+        </p:txBody>
+      </p:sp>
+      <p:sp>
+        <p:nvSpPr>
+          <p:cNvPr id="15" name="TextBox 14"/>
+          <p:cNvSpPr txBox="1"/>
+          <p:nvPr/>
+        </p:nvSpPr>
+        <p:spPr>
+          <a:xfrm>
+            <a:off x="886968" y="2724912"/>
+            <a:ext cx="3310128" cy="265176"/>
+          </a:xfrm>
+          <a:prstGeom prst="rect">
+            <a:avLst/>
+          </a:prstGeom>
+          <a:noFill/>
+        </p:spPr>
+        <p:txBody>
+          <a:bodyPr wrap="square" lIns="18288" rIns="18288" tIns="9144" bIns="0">
+            <a:spAutoFit/>
+          </a:bodyPr>
+          <a:lstStyle/>
+          <a:p>
+            <a:pPr>
+              <a:defRPr sz="1170" b="0">
+                <a:solidFill>
+                  <a:srgbClr val="17221F"/>
+                </a:solidFill>
+                <a:latin typeface="Inter"/>
+              </a:defRPr>
+            </a:pPr>
+            <a:r>
+              <a:t>Chemises &amp; blouses</a:t>
+            </a:r>
+          </a:p>
+        </p:txBody>
+      </p:sp>
+      <p:sp>
+        <p:nvSpPr>
+          <p:cNvPr id="16" name="TextBox 15"/>
+          <p:cNvSpPr txBox="1"/>
+          <p:nvPr/>
+        </p:nvSpPr>
+        <p:spPr>
+          <a:xfrm>
+            <a:off x="4315968" y="2724912"/>
+            <a:ext cx="1124712" cy="265176"/>
+          </a:xfrm>
+          <a:prstGeom prst="rect">
+            <a:avLst/>
+          </a:prstGeom>
+          <a:noFill/>
+        </p:spPr>
+        <p:txBody>
+          <a:bodyPr wrap="square" lIns="18288" rIns="18288" tIns="9144" bIns="0">
+            <a:spAutoFit/>
+          </a:bodyPr>
+          <a:lstStyle/>
+          <a:p>
+            <a:pPr algn="r">
+              <a:defRPr sz="1170" b="0">
+                <a:solidFill>
+                  <a:srgbClr val="17221F"/>
+                </a:solidFill>
+                <a:latin typeface="Inter"/>
+              </a:defRPr>
+            </a:pPr>
+            <a:r>
+              <a:t>2,0 M€</a:t>
+            </a:r>
+          </a:p>
+        </p:txBody>
+      </p:sp>
+      <p:sp>
+        <p:nvSpPr>
+          <p:cNvPr id="17" name="TextBox 16"/>
+          <p:cNvSpPr txBox="1"/>
+          <p:nvPr/>
+        </p:nvSpPr>
+        <p:spPr>
+          <a:xfrm>
+            <a:off x="5614416" y="2724912"/>
+            <a:ext cx="832104" cy="265176"/>
+          </a:xfrm>
+          <a:prstGeom prst="rect">
+            <a:avLst/>
+          </a:prstGeom>
+          <a:noFill/>
+        </p:spPr>
+        <p:txBody>
+          <a:bodyPr wrap="square" lIns="18288" rIns="18288" tIns="9144" bIns="0">
+            <a:spAutoFit/>
+          </a:bodyPr>
+          <a:lstStyle/>
+          <a:p>
+            <a:pPr algn="r">
+              <a:defRPr sz="1170" b="0">
+                <a:solidFill>
+                  <a:srgbClr val="17221F"/>
+                </a:solidFill>
+                <a:latin typeface="Inter"/>
+              </a:defRPr>
+            </a:pPr>
+            <a:r>
+              <a:t>65</a:t>
+            </a:r>
+          </a:p>
+        </p:txBody>
+      </p:sp>
+      <p:sp>
+        <p:nvSpPr>
+          <p:cNvPr id="18" name="Rectangle 17"/>
+          <p:cNvSpPr/>
+          <p:nvPr/>
+        </p:nvSpPr>
+        <p:spPr>
+          <a:xfrm>
+            <a:off x="896112" y="3026664"/>
+            <a:ext cx="6172200" cy="7315"/>
+          </a:xfrm>
+          <a:prstGeom prst="rect">
+            <a:avLst/>
+          </a:prstGeom>
+          <a:solidFill>
+            <a:srgbClr val="DAE5D8"/>
+          </a:solidFill>
+          <a:ln>
+            <a:noFill/>
+          </a:ln>
+        </p:spPr>
+        <p:style>
+          <a:lnRef idx="1">
+            <a:schemeClr val="accent1"/>
+          </a:lnRef>
+          <a:fillRef idx="3">
+            <a:schemeClr val="accent1"/>
+          </a:fillRef>
+          <a:effectRef idx="2">
+            <a:schemeClr val="accent1"/>
+          </a:effectRef>
+          <a:fontRef idx="minor">
+            <a:schemeClr val="lt1"/>
+          </a:fontRef>
+        </p:style>
+        <p:txBody>
+          <a:bodyPr rtlCol="0" anchor="ctr"/>
+          <a:lstStyle/>
+          <a:p>
+            <a:pPr algn="ctr"/>
+          </a:p>
+        </p:txBody>
+      </p:sp>
+      <p:sp>
+        <p:nvSpPr>
+          <p:cNvPr id="19" name="TextBox 18"/>
+          <p:cNvSpPr txBox="1"/>
+          <p:nvPr/>
+        </p:nvSpPr>
+        <p:spPr>
+          <a:xfrm>
+            <a:off x="886968" y="3072384"/>
+            <a:ext cx="3310128" cy="265176"/>
+          </a:xfrm>
+          <a:prstGeom prst="rect">
+            <a:avLst/>
+          </a:prstGeom>
+          <a:noFill/>
+        </p:spPr>
+        <p:txBody>
+          <a:bodyPr wrap="square" lIns="18288" rIns="18288" tIns="9144" bIns="0">
+            <a:spAutoFit/>
+          </a:bodyPr>
+          <a:lstStyle/>
+          <a:p>
+            <a:pPr>
+              <a:defRPr sz="1170" b="0">
+                <a:solidFill>
+                  <a:srgbClr val="17221F"/>
+                </a:solidFill>
+                <a:latin typeface="Inter"/>
+              </a:defRPr>
+            </a:pPr>
+            <a:r>
+              <a:t>Vestes &amp; manteaux</a:t>
+            </a:r>
+          </a:p>
+        </p:txBody>
+      </p:sp>
+      <p:sp>
+        <p:nvSpPr>
+          <p:cNvPr id="20" name="TextBox 19"/>
+          <p:cNvSpPr txBox="1"/>
+          <p:nvPr/>
+        </p:nvSpPr>
+        <p:spPr>
+          <a:xfrm>
+            <a:off x="4315968" y="3072384"/>
+            <a:ext cx="1124712" cy="265176"/>
+          </a:xfrm>
+          <a:prstGeom prst="rect">
+            <a:avLst/>
+          </a:prstGeom>
+          <a:noFill/>
+        </p:spPr>
+        <p:txBody>
+          <a:bodyPr wrap="square" lIns="18288" rIns="18288" tIns="9144" bIns="0">
+            <a:spAutoFit/>
+          </a:bodyPr>
+          <a:lstStyle/>
+          <a:p>
+            <a:pPr algn="r">
+              <a:defRPr sz="1170" b="0">
+                <a:solidFill>
+                  <a:srgbClr val="17221F"/>
+                </a:solidFill>
+                <a:latin typeface="Inter"/>
+              </a:defRPr>
+            </a:pPr>
+            <a:r>
+              <a:t>1,6 M€</a:t>
+            </a:r>
+          </a:p>
+        </p:txBody>
+      </p:sp>
+      <p:sp>
+        <p:nvSpPr>
+          <p:cNvPr id="21" name="TextBox 20"/>
+          <p:cNvSpPr txBox="1"/>
+          <p:nvPr/>
+        </p:nvSpPr>
+        <p:spPr>
+          <a:xfrm>
+            <a:off x="5614416" y="3072384"/>
+            <a:ext cx="832104" cy="265176"/>
+          </a:xfrm>
+          <a:prstGeom prst="rect">
+            <a:avLst/>
+          </a:prstGeom>
+          <a:noFill/>
+        </p:spPr>
+        <p:txBody>
+          <a:bodyPr wrap="square" lIns="18288" rIns="18288" tIns="9144" bIns="0">
+            <a:spAutoFit/>
+          </a:bodyPr>
+          <a:lstStyle/>
+          <a:p>
+            <a:pPr algn="r">
+              <a:defRPr sz="1170" b="0">
+                <a:solidFill>
+                  <a:srgbClr val="17221F"/>
+                </a:solidFill>
+                <a:latin typeface="Inter"/>
+              </a:defRPr>
+            </a:pPr>
+            <a:r>
+              <a:t>90</a:t>
+            </a:r>
+          </a:p>
+        </p:txBody>
+      </p:sp>
+      <p:sp>
+        <p:nvSpPr>
+          <p:cNvPr id="22" name="Rectangle 21"/>
+          <p:cNvSpPr/>
+          <p:nvPr/>
+        </p:nvSpPr>
+        <p:spPr>
+          <a:xfrm>
+            <a:off x="896112" y="3374136"/>
+            <a:ext cx="6172200" cy="7315"/>
+          </a:xfrm>
+          <a:prstGeom prst="rect">
+            <a:avLst/>
+          </a:prstGeom>
+          <a:solidFill>
+            <a:srgbClr val="DAE5D8"/>
+          </a:solidFill>
+          <a:ln>
+            <a:noFill/>
+          </a:ln>
+        </p:spPr>
+        <p:style>
+          <a:lnRef idx="1">
+            <a:schemeClr val="accent1"/>
+          </a:lnRef>
+          <a:fillRef idx="3">
+            <a:schemeClr val="accent1"/>
+          </a:fillRef>
+          <a:effectRef idx="2">
+            <a:schemeClr val="accent1"/>
+          </a:effectRef>
+          <a:fontRef idx="minor">
+            <a:schemeClr val="lt1"/>
+          </a:fontRef>
+        </p:style>
+        <p:txBody>
+          <a:bodyPr rtlCol="0" anchor="ctr"/>
+          <a:lstStyle/>
+          <a:p>
+            <a:pPr algn="ctr"/>
+          </a:p>
+        </p:txBody>
+      </p:sp>
+      <p:sp>
+        <p:nvSpPr>
+          <p:cNvPr id="23" name="TextBox 22"/>
+          <p:cNvSpPr txBox="1"/>
+          <p:nvPr/>
+        </p:nvSpPr>
+        <p:spPr>
+          <a:xfrm>
+            <a:off x="886968" y="3419856"/>
+            <a:ext cx="3310128" cy="265176"/>
+          </a:xfrm>
+          <a:prstGeom prst="rect">
+            <a:avLst/>
+          </a:prstGeom>
+          <a:noFill/>
+        </p:spPr>
+        <p:txBody>
+          <a:bodyPr wrap="square" lIns="18288" rIns="18288" tIns="9144" bIns="0">
+            <a:spAutoFit/>
+          </a:bodyPr>
+          <a:lstStyle/>
+          <a:p>
+            <a:pPr>
+              <a:defRPr sz="1170" b="0">
+                <a:solidFill>
+                  <a:srgbClr val="17221F"/>
+                </a:solidFill>
+                <a:latin typeface="Inter"/>
+              </a:defRPr>
+            </a:pPr>
+            <a:r>
+              <a:t>T-shirts &amp; tops</a:t>
+            </a:r>
+          </a:p>
+        </p:txBody>
+      </p:sp>
+      <p:sp>
+        <p:nvSpPr>
+          <p:cNvPr id="24" name="TextBox 23"/>
+          <p:cNvSpPr txBox="1"/>
+          <p:nvPr/>
+        </p:nvSpPr>
+        <p:spPr>
+          <a:xfrm>
+            <a:off x="4315968" y="3419856"/>
+            <a:ext cx="1124712" cy="265176"/>
+          </a:xfrm>
+          <a:prstGeom prst="rect">
+            <a:avLst/>
+          </a:prstGeom>
+          <a:noFill/>
+        </p:spPr>
+        <p:txBody>
+          <a:bodyPr wrap="square" lIns="18288" rIns="18288" tIns="9144" bIns="0">
+            <a:spAutoFit/>
+          </a:bodyPr>
+          <a:lstStyle/>
+          <a:p>
+            <a:pPr algn="r">
+              <a:defRPr sz="1170" b="0">
+                <a:solidFill>
+                  <a:srgbClr val="17221F"/>
+                </a:solidFill>
+                <a:latin typeface="Inter"/>
+              </a:defRPr>
+            </a:pPr>
+            <a:r>
+              <a:t>1,1 M€</a:t>
+            </a:r>
+          </a:p>
+        </p:txBody>
+      </p:sp>
+      <p:sp>
+        <p:nvSpPr>
+          <p:cNvPr id="25" name="TextBox 24"/>
+          <p:cNvSpPr txBox="1"/>
+          <p:nvPr/>
+        </p:nvSpPr>
+        <p:spPr>
+          <a:xfrm>
+            <a:off x="5614416" y="3419856"/>
+            <a:ext cx="832104" cy="265176"/>
+          </a:xfrm>
+          <a:prstGeom prst="rect">
+            <a:avLst/>
+          </a:prstGeom>
+          <a:noFill/>
+        </p:spPr>
+        <p:txBody>
+          <a:bodyPr wrap="square" lIns="18288" rIns="18288" tIns="9144" bIns="0">
+            <a:spAutoFit/>
+          </a:bodyPr>
+          <a:lstStyle/>
+          <a:p>
+            <a:pPr algn="r">
+              <a:defRPr sz="1170" b="0">
+                <a:solidFill>
+                  <a:srgbClr val="17221F"/>
+                </a:solidFill>
+                <a:latin typeface="Inter"/>
+              </a:defRPr>
+            </a:pPr>
+            <a:r>
+              <a:t>200</a:t>
+            </a:r>
+          </a:p>
+        </p:txBody>
+      </p:sp>
+      <p:sp>
+        <p:nvSpPr>
+          <p:cNvPr id="26" name="Rectangle 25"/>
+          <p:cNvSpPr/>
+          <p:nvPr/>
+        </p:nvSpPr>
+        <p:spPr>
+          <a:xfrm>
+            <a:off x="896112" y="3721608"/>
+            <a:ext cx="6172200" cy="7315"/>
+          </a:xfrm>
+          <a:prstGeom prst="rect">
+            <a:avLst/>
+          </a:prstGeom>
+          <a:solidFill>
+            <a:srgbClr val="DAE5D8"/>
+          </a:solidFill>
+          <a:ln>
+            <a:noFill/>
+          </a:ln>
+        </p:spPr>
+        <p:style>
+          <a:lnRef idx="1">
+            <a:schemeClr val="accent1"/>
+          </a:lnRef>
+          <a:fillRef idx="3">
+            <a:schemeClr val="accent1"/>
+          </a:fillRef>
+          <a:effectRef idx="2">
+            <a:schemeClr val="accent1"/>
+          </a:effectRef>
+          <a:fontRef idx="minor">
+            <a:schemeClr val="lt1"/>
+          </a:fontRef>
+        </p:style>
+        <p:txBody>
+          <a:bodyPr rtlCol="0" anchor="ctr"/>
+          <a:lstStyle/>
+          <a:p>
+            <a:pPr algn="ctr"/>
+          </a:p>
+        </p:txBody>
+      </p:sp>
+      <p:sp>
+        <p:nvSpPr>
+          <p:cNvPr id="27" name="TextBox 26"/>
+          <p:cNvSpPr txBox="1"/>
+          <p:nvPr/>
+        </p:nvSpPr>
+        <p:spPr>
+          <a:xfrm>
+            <a:off x="886968" y="3767328"/>
+            <a:ext cx="3310128" cy="265176"/>
+          </a:xfrm>
+          <a:prstGeom prst="rect">
+            <a:avLst/>
+          </a:prstGeom>
+          <a:noFill/>
+        </p:spPr>
+        <p:txBody>
+          <a:bodyPr wrap="square" lIns="18288" rIns="18288" tIns="9144" bIns="0">
+            <a:spAutoFit/>
+          </a:bodyPr>
+          <a:lstStyle/>
+          <a:p>
+            <a:pPr>
+              <a:defRPr sz="1170" b="0">
+                <a:solidFill>
+                  <a:srgbClr val="17221F"/>
+                </a:solidFill>
+                <a:latin typeface="Inter"/>
+              </a:defRPr>
+            </a:pPr>
+            <a:r>
+              <a:t>Robes &amp; jupes</a:t>
+            </a:r>
+          </a:p>
+        </p:txBody>
+      </p:sp>
+      <p:sp>
+        <p:nvSpPr>
+          <p:cNvPr id="28" name="TextBox 27"/>
+          <p:cNvSpPr txBox="1"/>
+          <p:nvPr/>
+        </p:nvSpPr>
+        <p:spPr>
+          <a:xfrm>
+            <a:off x="4315968" y="3767328"/>
+            <a:ext cx="1124712" cy="265176"/>
+          </a:xfrm>
+          <a:prstGeom prst="rect">
+            <a:avLst/>
+          </a:prstGeom>
+          <a:noFill/>
+        </p:spPr>
+        <p:txBody>
+          <a:bodyPr wrap="square" lIns="18288" rIns="18288" tIns="9144" bIns="0">
+            <a:spAutoFit/>
+          </a:bodyPr>
+          <a:lstStyle/>
+          <a:p>
+            <a:pPr algn="r">
+              <a:defRPr sz="1170" b="0">
+                <a:solidFill>
+                  <a:srgbClr val="17221F"/>
+                </a:solidFill>
+                <a:latin typeface="Inter"/>
+              </a:defRPr>
+            </a:pPr>
+            <a:r>
+              <a:t>0,9 M€</a:t>
+            </a:r>
+          </a:p>
+        </p:txBody>
+      </p:sp>
+      <p:sp>
+        <p:nvSpPr>
+          <p:cNvPr id="29" name="TextBox 28"/>
+          <p:cNvSpPr txBox="1"/>
+          <p:nvPr/>
+        </p:nvSpPr>
+        <p:spPr>
+          <a:xfrm>
+            <a:off x="5614416" y="3767328"/>
+            <a:ext cx="832104" cy="265176"/>
+          </a:xfrm>
+          <a:prstGeom prst="rect">
+            <a:avLst/>
+          </a:prstGeom>
+          <a:noFill/>
+        </p:spPr>
+        <p:txBody>
+          <a:bodyPr wrap="square" lIns="18288" rIns="18288" tIns="9144" bIns="0">
+            <a:spAutoFit/>
+          </a:bodyPr>
+          <a:lstStyle/>
+          <a:p>
+            <a:pPr algn="r">
+              <a:defRPr sz="1170" b="0">
+                <a:solidFill>
+                  <a:srgbClr val="17221F"/>
+                </a:solidFill>
+                <a:latin typeface="Inter"/>
+              </a:defRPr>
+            </a:pPr>
+            <a:r>
+              <a:t>75</a:t>
+            </a:r>
+          </a:p>
+        </p:txBody>
+      </p:sp>
+      <p:sp>
+        <p:nvSpPr>
+          <p:cNvPr id="30" name="Rectangle 29"/>
+          <p:cNvSpPr/>
+          <p:nvPr/>
+        </p:nvSpPr>
+        <p:spPr>
+          <a:xfrm>
+            <a:off x="896112" y="4069080"/>
+            <a:ext cx="6172200" cy="7315"/>
+          </a:xfrm>
+          <a:prstGeom prst="rect">
+            <a:avLst/>
+          </a:prstGeom>
+          <a:solidFill>
+            <a:srgbClr val="DAE5D8"/>
+          </a:solidFill>
+          <a:ln>
+            <a:noFill/>
+          </a:ln>
+        </p:spPr>
+        <p:style>
+          <a:lnRef idx="1">
+            <a:schemeClr val="accent1"/>
+          </a:lnRef>
+          <a:fillRef idx="3">
+            <a:schemeClr val="accent1"/>
+          </a:fillRef>
+          <a:effectRef idx="2">
+            <a:schemeClr val="accent1"/>
+          </a:effectRef>
+          <a:fontRef idx="minor">
+            <a:schemeClr val="lt1"/>
+          </a:fontRef>
+        </p:style>
+        <p:txBody>
+          <a:bodyPr rtlCol="0" anchor="ctr"/>
+          <a:lstStyle/>
+          <a:p>
+            <a:pPr algn="ctr"/>
+          </a:p>
+        </p:txBody>
+      </p:sp>
+      <p:sp>
+        <p:nvSpPr>
+          <p:cNvPr id="31" name="TextBox 30"/>
+          <p:cNvSpPr txBox="1"/>
+          <p:nvPr/>
+        </p:nvSpPr>
+        <p:spPr>
+          <a:xfrm>
+            <a:off x="886968" y="4114800"/>
+            <a:ext cx="3310128" cy="265176"/>
+          </a:xfrm>
+          <a:prstGeom prst="rect">
+            <a:avLst/>
+          </a:prstGeom>
+          <a:noFill/>
+        </p:spPr>
+        <p:txBody>
+          <a:bodyPr wrap="square" lIns="18288" rIns="18288" tIns="9144" bIns="0">
+            <a:spAutoFit/>
+          </a:bodyPr>
+          <a:lstStyle/>
+          <a:p>
+            <a:pPr>
+              <a:defRPr sz="1170" b="0">
+                <a:solidFill>
+                  <a:srgbClr val="17221F"/>
+                </a:solidFill>
+                <a:latin typeface="Inter"/>
+              </a:defRPr>
+            </a:pPr>
+            <a:r>
+              <a:t>Costumes &amp; tailleurs</a:t>
+            </a:r>
+          </a:p>
+        </p:txBody>
+      </p:sp>
+      <p:sp>
+        <p:nvSpPr>
+          <p:cNvPr id="32" name="TextBox 31"/>
+          <p:cNvSpPr txBox="1"/>
+          <p:nvPr/>
+        </p:nvSpPr>
+        <p:spPr>
+          <a:xfrm>
+            <a:off x="4315968" y="4114800"/>
+            <a:ext cx="1124712" cy="265176"/>
+          </a:xfrm>
+          <a:prstGeom prst="rect">
+            <a:avLst/>
+          </a:prstGeom>
+          <a:noFill/>
+        </p:spPr>
+        <p:txBody>
+          <a:bodyPr wrap="square" lIns="18288" rIns="18288" tIns="9144" bIns="0">
+            <a:spAutoFit/>
+          </a:bodyPr>
+          <a:lstStyle/>
+          <a:p>
+            <a:pPr algn="r">
+              <a:defRPr sz="1170" b="0">
+                <a:solidFill>
+                  <a:srgbClr val="17221F"/>
+                </a:solidFill>
+                <a:latin typeface="Inter"/>
+              </a:defRPr>
+            </a:pPr>
+            <a:r>
+              <a:t>0,7 M€</a:t>
+            </a:r>
+          </a:p>
+        </p:txBody>
+      </p:sp>
+      <p:sp>
+        <p:nvSpPr>
+          <p:cNvPr id="33" name="TextBox 32"/>
+          <p:cNvSpPr txBox="1"/>
+          <p:nvPr/>
+        </p:nvSpPr>
+        <p:spPr>
+          <a:xfrm>
+            <a:off x="5614416" y="4114800"/>
+            <a:ext cx="832104" cy="265176"/>
+          </a:xfrm>
+          <a:prstGeom prst="rect">
+            <a:avLst/>
+          </a:prstGeom>
+          <a:noFill/>
+        </p:spPr>
+        <p:txBody>
+          <a:bodyPr wrap="square" lIns="18288" rIns="18288" tIns="9144" bIns="0">
+            <a:spAutoFit/>
+          </a:bodyPr>
+          <a:lstStyle/>
+          <a:p>
+            <a:pPr algn="r">
+              <a:defRPr sz="1170" b="0">
+                <a:solidFill>
+                  <a:srgbClr val="17221F"/>
+                </a:solidFill>
+                <a:latin typeface="Inter"/>
+              </a:defRPr>
+            </a:pPr>
+            <a:r>
+              <a:t>40</a:t>
+            </a:r>
+          </a:p>
+        </p:txBody>
+      </p:sp>
+      <p:sp>
+        <p:nvSpPr>
+          <p:cNvPr id="34" name="Rectangle 33"/>
+          <p:cNvSpPr/>
+          <p:nvPr/>
+        </p:nvSpPr>
+        <p:spPr>
+          <a:xfrm>
+            <a:off x="896112" y="4416552"/>
+            <a:ext cx="6172200" cy="7315"/>
+          </a:xfrm>
+          <a:prstGeom prst="rect">
+            <a:avLst/>
+          </a:prstGeom>
+          <a:solidFill>
+            <a:srgbClr val="DAE5D8"/>
+          </a:solidFill>
+          <a:ln>
+            <a:noFill/>
+          </a:ln>
+        </p:spPr>
+        <p:style>
+          <a:lnRef idx="1">
+            <a:schemeClr val="accent1"/>
+          </a:lnRef>
+          <a:fillRef idx="3">
+            <a:schemeClr val="accent1"/>
+          </a:fillRef>
+          <a:effectRef idx="2">
+            <a:schemeClr val="accent1"/>
+          </a:effectRef>
+          <a:fontRef idx="minor">
+            <a:schemeClr val="lt1"/>
+          </a:fontRef>
+        </p:style>
+        <p:txBody>
+          <a:bodyPr rtlCol="0" anchor="ctr"/>
+          <a:lstStyle/>
+          <a:p>
+            <a:pPr algn="ctr"/>
+          </a:p>
+        </p:txBody>
+      </p:sp>
+      <p:sp>
+        <p:nvSpPr>
+          <p:cNvPr id="35" name="TextBox 34"/>
+          <p:cNvSpPr txBox="1"/>
+          <p:nvPr/>
+        </p:nvSpPr>
+        <p:spPr>
+          <a:xfrm>
+            <a:off x="886968" y="4462272"/>
+            <a:ext cx="3310128" cy="265176"/>
+          </a:xfrm>
+          <a:prstGeom prst="rect">
+            <a:avLst/>
+          </a:prstGeom>
+          <a:noFill/>
+        </p:spPr>
+        <p:txBody>
+          <a:bodyPr wrap="square" lIns="18288" rIns="18288" tIns="9144" bIns="0">
+            <a:spAutoFit/>
+          </a:bodyPr>
+          <a:lstStyle/>
+          <a:p>
+            <a:pPr>
+              <a:defRPr sz="1170" b="0">
+                <a:solidFill>
+                  <a:srgbClr val="17221F"/>
+                </a:solidFill>
+                <a:latin typeface="Inter"/>
+              </a:defRPr>
+            </a:pPr>
+            <a:r>
+              <a:t>Accessoires</a:t>
+            </a:r>
+          </a:p>
+        </p:txBody>
+      </p:sp>
+      <p:sp>
+        <p:nvSpPr>
+          <p:cNvPr id="36" name="TextBox 35"/>
+          <p:cNvSpPr txBox="1"/>
+          <p:nvPr/>
+        </p:nvSpPr>
+        <p:spPr>
+          <a:xfrm>
+            <a:off x="4315968" y="4462272"/>
+            <a:ext cx="1124712" cy="265176"/>
+          </a:xfrm>
+          <a:prstGeom prst="rect">
+            <a:avLst/>
+          </a:prstGeom>
+          <a:noFill/>
+        </p:spPr>
+        <p:txBody>
+          <a:bodyPr wrap="square" lIns="18288" rIns="18288" tIns="9144" bIns="0">
+            <a:spAutoFit/>
+          </a:bodyPr>
+          <a:lstStyle/>
+          <a:p>
+            <a:pPr algn="r">
+              <a:defRPr sz="1170" b="0">
+                <a:solidFill>
+                  <a:srgbClr val="17221F"/>
+                </a:solidFill>
+                <a:latin typeface="Inter"/>
+              </a:defRPr>
+            </a:pPr>
+            <a:r>
+              <a:t>0,6 M€</a:t>
+            </a:r>
+          </a:p>
+        </p:txBody>
+      </p:sp>
+      <p:sp>
+        <p:nvSpPr>
+          <p:cNvPr id="37" name="TextBox 36"/>
+          <p:cNvSpPr txBox="1"/>
+          <p:nvPr/>
+        </p:nvSpPr>
+        <p:spPr>
+          <a:xfrm>
+            <a:off x="5614416" y="4462272"/>
+            <a:ext cx="832104" cy="265176"/>
+          </a:xfrm>
+          <a:prstGeom prst="rect">
+            <a:avLst/>
+          </a:prstGeom>
+          <a:noFill/>
+        </p:spPr>
+        <p:txBody>
+          <a:bodyPr wrap="square" lIns="18288" rIns="18288" tIns="9144" bIns="0">
+            <a:spAutoFit/>
+          </a:bodyPr>
+          <a:lstStyle/>
+          <a:p>
+            <a:pPr algn="r">
+              <a:defRPr sz="1170" b="0">
+                <a:solidFill>
+                  <a:srgbClr val="17221F"/>
+                </a:solidFill>
+                <a:latin typeface="Inter"/>
+              </a:defRPr>
+            </a:pPr>
+            <a:r>
+              <a:t>150</a:t>
+            </a:r>
+          </a:p>
+        </p:txBody>
+      </p:sp>
+      <p:sp>
+        <p:nvSpPr>
+          <p:cNvPr id="38" name="Rectangle 37"/>
+          <p:cNvSpPr/>
+          <p:nvPr/>
+        </p:nvSpPr>
+        <p:spPr>
+          <a:xfrm>
+            <a:off x="896112" y="4764024"/>
+            <a:ext cx="6172200" cy="7315"/>
+          </a:xfrm>
+          <a:prstGeom prst="rect">
+            <a:avLst/>
+          </a:prstGeom>
+          <a:solidFill>
+            <a:srgbClr val="DAE5D8"/>
+          </a:solidFill>
+          <a:ln>
+            <a:noFill/>
+          </a:ln>
+        </p:spPr>
+        <p:style>
+          <a:lnRef idx="1">
+            <a:schemeClr val="accent1"/>
+          </a:lnRef>
+          <a:fillRef idx="3">
+            <a:schemeClr val="accent1"/>
+          </a:fillRef>
+          <a:effectRef idx="2">
+            <a:schemeClr val="accent1"/>
+          </a:effectRef>
+          <a:fontRef idx="minor">
+            <a:schemeClr val="lt1"/>
+          </a:fontRef>
+        </p:style>
+        <p:txBody>
+          <a:bodyPr rtlCol="0" anchor="ctr"/>
+          <a:lstStyle/>
+          <a:p>
+            <a:pPr algn="ctr"/>
+          </a:p>
+        </p:txBody>
+      </p:sp>
+      <p:sp>
+        <p:nvSpPr>
+          <p:cNvPr id="39" name="TextBox 38"/>
+          <p:cNvSpPr txBox="1"/>
+          <p:nvPr/>
+        </p:nvSpPr>
+        <p:spPr>
+          <a:xfrm>
+            <a:off x="886968" y="4809744"/>
+            <a:ext cx="3310128" cy="265176"/>
+          </a:xfrm>
+          <a:prstGeom prst="rect">
+            <a:avLst/>
+          </a:prstGeom>
+          <a:noFill/>
+        </p:spPr>
+        <p:txBody>
+          <a:bodyPr wrap="square" lIns="18288" rIns="18288" tIns="9144" bIns="0">
+            <a:spAutoFit/>
+          </a:bodyPr>
+          <a:lstStyle/>
+          <a:p>
+            <a:pPr>
+              <a:defRPr sz="1170" b="0">
+                <a:solidFill>
+                  <a:srgbClr val="17221F"/>
+                </a:solidFill>
+                <a:latin typeface="Inter"/>
+              </a:defRPr>
+            </a:pPr>
+            <a:r>
+              <a:t>Chaussures</a:t>
+            </a:r>
+          </a:p>
+        </p:txBody>
+      </p:sp>
+      <p:sp>
+        <p:nvSpPr>
+          <p:cNvPr id="40" name="TextBox 39"/>
+          <p:cNvSpPr txBox="1"/>
+          <p:nvPr/>
+        </p:nvSpPr>
+        <p:spPr>
+          <a:xfrm>
+            <a:off x="4315968" y="4809744"/>
+            <a:ext cx="1124712" cy="265176"/>
+          </a:xfrm>
+          <a:prstGeom prst="rect">
+            <a:avLst/>
+          </a:prstGeom>
+          <a:noFill/>
+        </p:spPr>
+        <p:txBody>
+          <a:bodyPr wrap="square" lIns="18288" rIns="18288" tIns="9144" bIns="0">
+            <a:spAutoFit/>
+          </a:bodyPr>
+          <a:lstStyle/>
+          <a:p>
+            <a:pPr algn="r">
+              <a:defRPr sz="1170" b="0">
+                <a:solidFill>
+                  <a:srgbClr val="17221F"/>
+                </a:solidFill>
+                <a:latin typeface="Inter"/>
+              </a:defRPr>
+            </a:pPr>
+            <a:r>
+              <a:t>0,4 M€</a:t>
+            </a:r>
+          </a:p>
+        </p:txBody>
+      </p:sp>
+      <p:sp>
+        <p:nvSpPr>
+          <p:cNvPr id="41" name="TextBox 40"/>
+          <p:cNvSpPr txBox="1"/>
+          <p:nvPr/>
+        </p:nvSpPr>
+        <p:spPr>
+          <a:xfrm>
+            <a:off x="5614416" y="4809744"/>
+            <a:ext cx="832104" cy="265176"/>
+          </a:xfrm>
+          <a:prstGeom prst="rect">
+            <a:avLst/>
+          </a:prstGeom>
+          <a:noFill/>
+        </p:spPr>
+        <p:txBody>
+          <a:bodyPr wrap="square" lIns="18288" rIns="18288" tIns="9144" bIns="0">
+            <a:spAutoFit/>
+          </a:bodyPr>
+          <a:lstStyle/>
+          <a:p>
+            <a:pPr algn="r">
+              <a:defRPr sz="1170" b="0">
+                <a:solidFill>
+                  <a:srgbClr val="17221F"/>
+                </a:solidFill>
+                <a:latin typeface="Inter"/>
+              </a:defRPr>
+            </a:pPr>
+            <a:r>
+              <a:t>100</a:t>
+            </a:r>
+          </a:p>
+        </p:txBody>
+      </p:sp>
+      <p:sp>
+        <p:nvSpPr>
+          <p:cNvPr id="42" name="Rectangle 41"/>
+          <p:cNvSpPr/>
+          <p:nvPr/>
+        </p:nvSpPr>
+        <p:spPr>
+          <a:xfrm>
+            <a:off x="896112" y="5111496"/>
+            <a:ext cx="6172200" cy="7315"/>
+          </a:xfrm>
+          <a:prstGeom prst="rect">
+            <a:avLst/>
+          </a:prstGeom>
+          <a:solidFill>
+            <a:srgbClr val="DAE5D8"/>
+          </a:solidFill>
+          <a:ln>
+            <a:noFill/>
+          </a:ln>
+        </p:spPr>
+        <p:style>
+          <a:lnRef idx="1">
+            <a:schemeClr val="accent1"/>
+          </a:lnRef>
+          <a:fillRef idx="3">
+            <a:schemeClr val="accent1"/>
+          </a:fillRef>
+          <a:effectRef idx="2">
+            <a:schemeClr val="accent1"/>
+          </a:effectRef>
+          <a:fontRef idx="minor">
+            <a:schemeClr val="lt1"/>
+          </a:fontRef>
+        </p:style>
+        <p:txBody>
+          <a:bodyPr rtlCol="0" anchor="ctr"/>
+          <a:lstStyle/>
+          <a:p>
+            <a:pPr algn="ctr"/>
+          </a:p>
+        </p:txBody>
+      </p:sp>
+      <p:sp>
+        <p:nvSpPr>
+          <p:cNvPr id="43" name="TextBox 42"/>
+          <p:cNvSpPr txBox="1"/>
+          <p:nvPr/>
+        </p:nvSpPr>
+        <p:spPr>
+          <a:xfrm>
+            <a:off x="886968" y="5157216"/>
+            <a:ext cx="3310128" cy="265176"/>
+          </a:xfrm>
+          <a:prstGeom prst="rect">
+            <a:avLst/>
+          </a:prstGeom>
+          <a:noFill/>
+        </p:spPr>
+        <p:txBody>
+          <a:bodyPr wrap="square" lIns="18288" rIns="18288" tIns="9144" bIns="0">
+            <a:spAutoFit/>
+          </a:bodyPr>
+          <a:lstStyle/>
+          <a:p>
+            <a:pPr>
+              <a:defRPr sz="1170" b="0">
+                <a:solidFill>
+                  <a:srgbClr val="17221F"/>
+                </a:solidFill>
+                <a:latin typeface="Inter"/>
+              </a:defRPr>
+            </a:pPr>
+            <a:r>
+              <a:t>Lingerie</a:t>
+            </a:r>
+          </a:p>
+        </p:txBody>
+      </p:sp>
+      <p:sp>
+        <p:nvSpPr>
+          <p:cNvPr id="44" name="TextBox 43"/>
+          <p:cNvSpPr txBox="1"/>
+          <p:nvPr/>
+        </p:nvSpPr>
+        <p:spPr>
+          <a:xfrm>
+            <a:off x="4315968" y="5157216"/>
+            <a:ext cx="1124712" cy="265176"/>
+          </a:xfrm>
+          <a:prstGeom prst="rect">
+            <a:avLst/>
+          </a:prstGeom>
+          <a:noFill/>
+        </p:spPr>
+        <p:txBody>
+          <a:bodyPr wrap="square" lIns="18288" rIns="18288" tIns="9144" bIns="0">
+            <a:spAutoFit/>
+          </a:bodyPr>
+          <a:lstStyle/>
+          <a:p>
+            <a:pPr algn="r">
+              <a:defRPr sz="1170" b="0">
+                <a:solidFill>
+                  <a:srgbClr val="17221F"/>
+                </a:solidFill>
+                <a:latin typeface="Inter"/>
+              </a:defRPr>
+            </a:pPr>
+            <a:r>
+              <a:t>0,3 M€</a:t>
+            </a:r>
+          </a:p>
+        </p:txBody>
+      </p:sp>
+      <p:sp>
+        <p:nvSpPr>
+          <p:cNvPr id="45" name="TextBox 44"/>
+          <p:cNvSpPr txBox="1"/>
+          <p:nvPr/>
+        </p:nvSpPr>
+        <p:spPr>
+          <a:xfrm>
+            <a:off x="5614416" y="5157216"/>
+            <a:ext cx="832104" cy="265176"/>
+          </a:xfrm>
+          <a:prstGeom prst="rect">
+            <a:avLst/>
+          </a:prstGeom>
+          <a:noFill/>
+        </p:spPr>
+        <p:txBody>
+          <a:bodyPr wrap="square" lIns="18288" rIns="18288" tIns="9144" bIns="0">
+            <a:spAutoFit/>
+          </a:bodyPr>
+          <a:lstStyle/>
+          <a:p>
+            <a:pPr algn="r">
+              <a:defRPr sz="1170" b="0">
+                <a:solidFill>
+                  <a:srgbClr val="17221F"/>
+                </a:solidFill>
+                <a:latin typeface="Inter"/>
+              </a:defRPr>
+            </a:pPr>
+            <a:r>
+              <a:t>35</a:t>
+            </a:r>
+          </a:p>
+        </p:txBody>
+      </p:sp>
+      <p:sp>
+        <p:nvSpPr>
+          <p:cNvPr id="46" name="TextBox 45"/>
+          <p:cNvSpPr txBox="1"/>
+          <p:nvPr/>
+        </p:nvSpPr>
+        <p:spPr>
+          <a:xfrm>
+            <a:off x="886968" y="5623560"/>
+            <a:ext cx="6080760" cy="237744"/>
+          </a:xfrm>
+          <a:prstGeom prst="rect">
+            <a:avLst/>
+          </a:prstGeom>
+          <a:noFill/>
+        </p:spPr>
+        <p:txBody>
+          <a:bodyPr wrap="square" lIns="18288" rIns="18288" tIns="9144" bIns="0">
+            <a:spAutoFit/>
+          </a:bodyPr>
+          <a:lstStyle/>
+          <a:p>
+            <a:pPr>
+              <a:defRPr sz="1140" b="1">
+                <a:solidFill>
+                  <a:srgbClr val="17221F"/>
+                </a:solidFill>
+                <a:latin typeface="Inter"/>
+              </a:defRPr>
+            </a:pPr>
+            <a:r>
+              <a:t>TOTAL  ·  10,4 M€  ·  875 produits</a:t>
+            </a:r>
+          </a:p>
+        </p:txBody>
+      </p:sp>
+      <p:sp>
+        <p:nvSpPr>
+          <p:cNvPr id="47" name="Rounded Rectangle 46"/>
+          <p:cNvSpPr/>
+          <p:nvPr/>
+        </p:nvSpPr>
+        <p:spPr>
+          <a:xfrm>
+            <a:off x="7434072" y="1874519"/>
+            <a:ext cx="4096512" cy="4261104"/>
+          </a:xfrm>
+          <a:prstGeom prst="roundRect">
+            <a:avLst/>
+          </a:prstGeom>
+          <a:solidFill>
+            <a:srgbClr val="17221F"/>
+          </a:solidFill>
+          <a:ln>
+            <a:noFill/>
+          </a:ln>
+        </p:spPr>
+        <p:style>
+          <a:lnRef idx="1">
+            <a:schemeClr val="accent1"/>
+          </a:lnRef>
+          <a:fillRef idx="3">
+            <a:schemeClr val="accent1"/>
+          </a:fillRef>
+          <a:effectRef idx="2">
+            <a:schemeClr val="accent1"/>
+          </a:effectRef>
+          <a:fontRef idx="minor">
+            <a:schemeClr val="lt1"/>
+          </a:fontRef>
+        </p:style>
+        <p:txBody>
+          <a:bodyPr rtlCol="0" anchor="ctr"/>
+          <a:lstStyle/>
+          <a:p>
+            <a:pPr algn="ctr"/>
+          </a:p>
+        </p:txBody>
+      </p:sp>
+      <p:sp>
+        <p:nvSpPr>
+          <p:cNvPr id="48" name="TextBox 47"/>
+          <p:cNvSpPr txBox="1"/>
+          <p:nvPr/>
+        </p:nvSpPr>
+        <p:spPr>
+          <a:xfrm>
+            <a:off x="7662672" y="2048256"/>
+            <a:ext cx="3520440" cy="274320"/>
+          </a:xfrm>
+          <a:prstGeom prst="rect">
+            <a:avLst/>
+          </a:prstGeom>
+          <a:noFill/>
+        </p:spPr>
+        <p:txBody>
+          <a:bodyPr wrap="square" lIns="18288" rIns="18288" tIns="9144" bIns="0">
+            <a:spAutoFit/>
+          </a:bodyPr>
+          <a:lstStyle/>
+          <a:p>
+            <a:pPr>
+              <a:defRPr sz="1210" b="1">
+                <a:solidFill>
+                  <a:srgbClr val="D4F086"/>
+                </a:solidFill>
+                <a:latin typeface="Inter"/>
+              </a:defRPr>
+            </a:pPr>
+            <a:r>
+              <a:t>5 STYLES FASHION-INSTA</a:t>
+            </a:r>
+          </a:p>
+        </p:txBody>
+      </p:sp>
+      <p:sp>
+        <p:nvSpPr>
+          <p:cNvPr id="49" name="TextBox 48"/>
+          <p:cNvSpPr txBox="1"/>
+          <p:nvPr/>
+        </p:nvSpPr>
+        <p:spPr>
+          <a:xfrm>
+            <a:off x="7680960" y="2496312"/>
+            <a:ext cx="3566160" cy="228600"/>
+          </a:xfrm>
+          <a:prstGeom prst="rect">
+            <a:avLst/>
+          </a:prstGeom>
+          <a:noFill/>
+        </p:spPr>
+        <p:txBody>
+          <a:bodyPr wrap="square" lIns="18288" rIns="18288" tIns="9144" bIns="0">
+            <a:spAutoFit/>
+          </a:bodyPr>
+          <a:lstStyle/>
+          <a:p>
+            <a:pPr>
+              <a:defRPr sz="1300" b="1">
+                <a:solidFill>
+                  <a:srgbClr val="FFFFFF"/>
+                </a:solidFill>
+                <a:latin typeface="Inter"/>
+              </a:defRPr>
+            </a:pPr>
+            <a:r>
+              <a:t>Essentiel urbain</a:t>
+            </a:r>
+          </a:p>
+        </p:txBody>
+      </p:sp>
+      <p:sp>
+        <p:nvSpPr>
+          <p:cNvPr id="50" name="TextBox 49"/>
+          <p:cNvSpPr txBox="1"/>
+          <p:nvPr/>
+        </p:nvSpPr>
+        <p:spPr>
+          <a:xfrm>
+            <a:off x="7680960" y="2724912"/>
+            <a:ext cx="3566160" cy="219456"/>
+          </a:xfrm>
+          <a:prstGeom prst="rect">
+            <a:avLst/>
+          </a:prstGeom>
+          <a:noFill/>
+        </p:spPr>
+        <p:txBody>
+          <a:bodyPr wrap="square" lIns="18288" rIns="18288" tIns="9144" bIns="0">
+            <a:spAutoFit/>
+          </a:bodyPr>
+          <a:lstStyle/>
+          <a:p>
+            <a:pPr>
+              <a:defRPr sz="1080" b="0">
+                <a:solidFill>
+                  <a:srgbClr val="C8DDCD"/>
+                </a:solidFill>
+                <a:latin typeface="Inter"/>
+              </a:defRPr>
+            </a:pPr>
+            <a:r>
+              <a:t>Ville et bureau</a:t>
+            </a:r>
+          </a:p>
+        </p:txBody>
+      </p:sp>
+      <p:sp>
+        <p:nvSpPr>
+          <p:cNvPr id="51" name="TextBox 50"/>
+          <p:cNvSpPr txBox="1"/>
+          <p:nvPr/>
+        </p:nvSpPr>
+        <p:spPr>
+          <a:xfrm>
+            <a:off x="7680960" y="3035808"/>
+            <a:ext cx="3566160" cy="228600"/>
+          </a:xfrm>
+          <a:prstGeom prst="rect">
+            <a:avLst/>
+          </a:prstGeom>
+          <a:noFill/>
+        </p:spPr>
+        <p:txBody>
+          <a:bodyPr wrap="square" lIns="18288" rIns="18288" tIns="9144" bIns="0">
+            <a:spAutoFit/>
+          </a:bodyPr>
+          <a:lstStyle/>
+          <a:p>
+            <a:pPr>
+              <a:defRPr sz="1300" b="1">
+                <a:solidFill>
+                  <a:srgbClr val="FFFFFF"/>
+                </a:solidFill>
+                <a:latin typeface="Inter"/>
+              </a:defRPr>
+            </a:pPr>
+            <a:r>
+              <a:t>Casual chic</a:t>
+            </a:r>
+          </a:p>
+        </p:txBody>
+      </p:sp>
+      <p:sp>
+        <p:nvSpPr>
+          <p:cNvPr id="52" name="TextBox 51"/>
+          <p:cNvSpPr txBox="1"/>
+          <p:nvPr/>
+        </p:nvSpPr>
+        <p:spPr>
+          <a:xfrm>
+            <a:off x="7680960" y="3264408"/>
+            <a:ext cx="3566160" cy="219456"/>
+          </a:xfrm>
+          <a:prstGeom prst="rect">
+            <a:avLst/>
+          </a:prstGeom>
+          <a:noFill/>
+        </p:spPr>
+        <p:txBody>
+          <a:bodyPr wrap="square" lIns="18288" rIns="18288" tIns="9144" bIns="0">
+            <a:spAutoFit/>
+          </a:bodyPr>
+          <a:lstStyle/>
+          <a:p>
+            <a:pPr>
+              <a:defRPr sz="1080" b="0">
+                <a:solidFill>
+                  <a:srgbClr val="C8DDCD"/>
+                </a:solidFill>
+                <a:latin typeface="Inter"/>
+              </a:defRPr>
+            </a:pPr>
+            <a:r>
+              <a:t>Confort élégant</a:t>
+            </a:r>
+          </a:p>
+        </p:txBody>
+      </p:sp>
+      <p:sp>
+        <p:nvSpPr>
+          <p:cNvPr id="53" name="TextBox 52"/>
+          <p:cNvSpPr txBox="1"/>
+          <p:nvPr/>
+        </p:nvSpPr>
+        <p:spPr>
+          <a:xfrm>
+            <a:off x="7680960" y="3575304"/>
+            <a:ext cx="3566160" cy="228600"/>
+          </a:xfrm>
+          <a:prstGeom prst="rect">
+            <a:avLst/>
+          </a:prstGeom>
+          <a:noFill/>
+        </p:spPr>
+        <p:txBody>
+          <a:bodyPr wrap="square" lIns="18288" rIns="18288" tIns="9144" bIns="0">
+            <a:spAutoFit/>
+          </a:bodyPr>
+          <a:lstStyle/>
+          <a:p>
+            <a:pPr>
+              <a:defRPr sz="1300" b="1">
+                <a:solidFill>
+                  <a:srgbClr val="FFFFFF"/>
+                </a:solidFill>
+                <a:latin typeface="Inter"/>
+              </a:defRPr>
+            </a:pPr>
+            <a:r>
+              <a:t>Professionnel moderne</a:t>
+            </a:r>
+          </a:p>
+        </p:txBody>
+      </p:sp>
+      <p:sp>
+        <p:nvSpPr>
+          <p:cNvPr id="54" name="TextBox 53"/>
+          <p:cNvSpPr txBox="1"/>
+          <p:nvPr/>
+        </p:nvSpPr>
+        <p:spPr>
+          <a:xfrm>
+            <a:off x="7680960" y="3803904"/>
+            <a:ext cx="3566160" cy="219456"/>
+          </a:xfrm>
+          <a:prstGeom prst="rect">
+            <a:avLst/>
+          </a:prstGeom>
+          <a:noFill/>
+        </p:spPr>
+        <p:txBody>
+          <a:bodyPr wrap="square" lIns="18288" rIns="18288" tIns="9144" bIns="0">
+            <a:spAutoFit/>
+          </a:bodyPr>
+          <a:lstStyle/>
+          <a:p>
+            <a:pPr>
+              <a:defRPr sz="1080" b="0">
+                <a:solidFill>
+                  <a:srgbClr val="C8DDCD"/>
+                </a:solidFill>
+                <a:latin typeface="Inter"/>
+              </a:defRPr>
+            </a:pPr>
+            <a:r>
+              <a:t>Tailleur / chemises</a:t>
+            </a:r>
+          </a:p>
+        </p:txBody>
+      </p:sp>
+      <p:sp>
+        <p:nvSpPr>
+          <p:cNvPr id="55" name="TextBox 54"/>
+          <p:cNvSpPr txBox="1"/>
+          <p:nvPr/>
+        </p:nvSpPr>
+        <p:spPr>
+          <a:xfrm>
+            <a:off x="7680960" y="4114800"/>
+            <a:ext cx="3566160" cy="228600"/>
+          </a:xfrm>
+          <a:prstGeom prst="rect">
+            <a:avLst/>
+          </a:prstGeom>
+          <a:noFill/>
+        </p:spPr>
+        <p:txBody>
+          <a:bodyPr wrap="square" lIns="18288" rIns="18288" tIns="9144" bIns="0">
+            <a:spAutoFit/>
+          </a:bodyPr>
+          <a:lstStyle/>
+          <a:p>
+            <a:pPr>
+              <a:defRPr sz="1300" b="1">
+                <a:solidFill>
+                  <a:srgbClr val="FFFFFF"/>
+                </a:solidFill>
+                <a:latin typeface="Inter"/>
+              </a:defRPr>
+            </a:pPr>
+            <a:r>
+              <a:t>Streetwear</a:t>
+            </a:r>
+          </a:p>
+        </p:txBody>
+      </p:sp>
+      <p:sp>
+        <p:nvSpPr>
+          <p:cNvPr id="56" name="TextBox 55"/>
+          <p:cNvSpPr txBox="1"/>
+          <p:nvPr/>
+        </p:nvSpPr>
+        <p:spPr>
+          <a:xfrm>
+            <a:off x="7680960" y="4343400"/>
+            <a:ext cx="3566160" cy="219456"/>
+          </a:xfrm>
+          <a:prstGeom prst="rect">
+            <a:avLst/>
+          </a:prstGeom>
+          <a:noFill/>
+        </p:spPr>
+        <p:txBody>
+          <a:bodyPr wrap="square" lIns="18288" rIns="18288" tIns="9144" bIns="0">
+            <a:spAutoFit/>
+          </a:bodyPr>
+          <a:lstStyle/>
+          <a:p>
+            <a:pPr>
+              <a:defRPr sz="1080" b="0">
+                <a:solidFill>
+                  <a:srgbClr val="C8DDCD"/>
+                </a:solidFill>
+                <a:latin typeface="Inter"/>
+              </a:defRPr>
+            </a:pPr>
+            <a:r>
+              <a:t>Graphismes / oversize</a:t>
+            </a:r>
+          </a:p>
+        </p:txBody>
+      </p:sp>
+      <p:sp>
+        <p:nvSpPr>
+          <p:cNvPr id="57" name="TextBox 56"/>
+          <p:cNvSpPr txBox="1"/>
+          <p:nvPr/>
+        </p:nvSpPr>
+        <p:spPr>
+          <a:xfrm>
+            <a:off x="7680960" y="4654296"/>
+            <a:ext cx="3566160" cy="228600"/>
+          </a:xfrm>
+          <a:prstGeom prst="rect">
+            <a:avLst/>
+          </a:prstGeom>
+          <a:noFill/>
+        </p:spPr>
+        <p:txBody>
+          <a:bodyPr wrap="square" lIns="18288" rIns="18288" tIns="9144" bIns="0">
+            <a:spAutoFit/>
+          </a:bodyPr>
+          <a:lstStyle/>
+          <a:p>
+            <a:pPr>
+              <a:defRPr sz="1300" b="1">
+                <a:solidFill>
+                  <a:srgbClr val="FFFFFF"/>
+                </a:solidFill>
+                <a:latin typeface="Inter"/>
+              </a:defRPr>
+            </a:pPr>
+            <a:r>
+              <a:t>Bohème féminin</a:t>
+            </a:r>
+          </a:p>
+        </p:txBody>
+      </p:sp>
+      <p:sp>
+        <p:nvSpPr>
+          <p:cNvPr id="58" name="TextBox 57"/>
+          <p:cNvSpPr txBox="1"/>
+          <p:nvPr/>
+        </p:nvSpPr>
+        <p:spPr>
+          <a:xfrm>
+            <a:off x="7680960" y="4882896"/>
+            <a:ext cx="3566160" cy="219456"/>
+          </a:xfrm>
+          <a:prstGeom prst="rect">
+            <a:avLst/>
+          </a:prstGeom>
+          <a:noFill/>
+        </p:spPr>
+        <p:txBody>
+          <a:bodyPr wrap="square" lIns="18288" rIns="18288" tIns="9144" bIns="0">
+            <a:spAutoFit/>
+          </a:bodyPr>
+          <a:lstStyle/>
+          <a:p>
+            <a:pPr>
+              <a:defRPr sz="1080" b="0">
+                <a:solidFill>
+                  <a:srgbClr val="C8DDCD"/>
+                </a:solidFill>
+                <a:latin typeface="Inter"/>
+              </a:defRPr>
+            </a:pPr>
+            <a:r>
+              <a:t>Fluidité / imprimés discrets</a:t>
+            </a:r>
+          </a:p>
+        </p:txBody>
+      </p:sp>
+      <p:sp>
+        <p:nvSpPr>
+          <p:cNvPr id="59" name="TextBox 58"/>
+          <p:cNvSpPr txBox="1"/>
+          <p:nvPr/>
+        </p:nvSpPr>
+        <p:spPr>
+          <a:xfrm>
+            <a:off x="795528" y="6217920"/>
+            <a:ext cx="10607040" cy="173736"/>
+          </a:xfrm>
+          <a:prstGeom prst="rect">
+            <a:avLst/>
+          </a:prstGeom>
+          <a:noFill/>
+        </p:spPr>
+        <p:txBody>
+          <a:bodyPr wrap="square" lIns="18288" rIns="18288" tIns="9144" bIns="0">
+            <a:spAutoFit/>
+          </a:bodyPr>
+          <a:lstStyle/>
+          <a:p>
+            <a:pPr>
+              <a:defRPr sz="940" b="0">
+                <a:solidFill>
+                  <a:srgbClr val="607069"/>
+                </a:solidFill>
+                <a:latin typeface="Inter"/>
+              </a:defRPr>
+            </a:pPr>
+            <a:r>
+              <a:t>Source : expression des besoins métier. Lingerie : 300 k€ = 2,88 % calculés, contre 3,9 % annoncé → clarification requise.</a:t>
+            </a:r>
+          </a:p>
+        </p:txBody>
+      </p:sp>
+    </p:spTree>
+  </p:cSld>
+  <p:clrMapOvr>
+    <a:masterClrMapping/>
+  </p:clrMapOvr>
+</p:sld>
+</file>
+
+<file path=ppt/slides/slide24.xml><?xml version="1.0" encoding="utf-8"?>
+<p:sld xmlns:a="http://schemas.openxmlformats.org/drawingml/2006/main" xmlns:p="http://schemas.openxmlformats.org/presentationml/2006/main" xmlns:r="http://schemas.openxmlformats.org/officeDocument/2006/relationships">
+  <p:cSld>
+    <p:spTree>
+      <p:nvGrpSpPr>
+        <p:cNvPr id="1" name=""/>
+        <p:cNvGrpSpPr/>
+        <p:nvPr/>
+      </p:nvGrpSpPr>
+      <p:grpSpPr/>
+      <p:sp>
+        <p:nvSpPr>
+          <p:cNvPr id="2" name="Rectangle 1"/>
+          <p:cNvSpPr/>
+          <p:nvPr/>
+        </p:nvSpPr>
+        <p:spPr>
+          <a:xfrm>
+            <a:off x="0" y="0"/>
+            <a:ext cx="12191695" cy="6858000"/>
+          </a:xfrm>
+          <a:prstGeom prst="rect">
+            <a:avLst/>
+          </a:prstGeom>
+          <a:solidFill>
+            <a:srgbClr val="FFFFFF"/>
+          </a:solidFill>
+          <a:ln>
+            <a:noFill/>
+          </a:ln>
+        </p:spPr>
+        <p:style>
+          <a:lnRef idx="1">
+            <a:schemeClr val="accent1"/>
+          </a:lnRef>
+          <a:fillRef idx="3">
+            <a:schemeClr val="accent1"/>
+          </a:fillRef>
+          <a:effectRef idx="2">
+            <a:schemeClr val="accent1"/>
+          </a:effectRef>
+          <a:fontRef idx="minor">
+            <a:schemeClr val="lt1"/>
+          </a:fontRef>
+        </p:style>
+        <p:txBody>
+          <a:bodyPr rtlCol="0" anchor="ctr"/>
+          <a:lstStyle/>
+          <a:p>
+            <a:pPr algn="ctr"/>
+          </a:p>
+        </p:txBody>
+      </p:sp>
+      <p:sp>
+        <p:nvSpPr>
+          <p:cNvPr id="3" name="TextBox 2"/>
+          <p:cNvSpPr txBox="1"/>
+          <p:nvPr/>
+        </p:nvSpPr>
+        <p:spPr>
+          <a:xfrm>
+            <a:off x="603504" y="256032"/>
+            <a:ext cx="10972800" cy="201168"/>
+          </a:xfrm>
+          <a:prstGeom prst="rect">
+            <a:avLst/>
+          </a:prstGeom>
+          <a:noFill/>
+        </p:spPr>
+        <p:txBody>
+          <a:bodyPr wrap="square" lIns="18288" rIns="18288" tIns="9144" bIns="0">
+            <a:spAutoFit/>
+          </a:bodyPr>
+          <a:lstStyle/>
+          <a:p>
+            <a:pPr>
+              <a:defRPr sz="1010" b="1">
+                <a:solidFill>
+                  <a:srgbClr val="607069"/>
+                </a:solidFill>
+                <a:latin typeface="Inter"/>
+              </a:defRPr>
+            </a:pPr>
+            <a:r>
+              <a:t>21  /  TRAÇABILITÉ DES BESOINS</a:t>
+            </a:r>
+          </a:p>
+        </p:txBody>
+      </p:sp>
+      <p:sp>
+        <p:nvSpPr>
+          <p:cNvPr id="4" name="TextBox 3"/>
+          <p:cNvSpPr txBox="1"/>
+          <p:nvPr/>
+        </p:nvSpPr>
+        <p:spPr>
+          <a:xfrm>
+            <a:off x="603504" y="658368"/>
+            <a:ext cx="10972800" cy="548640"/>
+          </a:xfrm>
+          <a:prstGeom prst="rect">
+            <a:avLst/>
+          </a:prstGeom>
+          <a:noFill/>
+        </p:spPr>
+        <p:txBody>
+          <a:bodyPr wrap="square" lIns="18288" rIns="18288" tIns="9144" bIns="0">
+            <a:spAutoFit/>
+          </a:bodyPr>
+          <a:lstStyle/>
+          <a:p>
+            <a:pPr>
+              <a:defRPr sz="2900" b="1">
+                <a:solidFill>
+                  <a:srgbClr val="17221F"/>
+                </a:solidFill>
+                <a:latin typeface="Inter Display"/>
+              </a:defRPr>
+            </a:pPr>
+            <a:r>
+              <a:t>Une vision produit complète, un PoC volontairement ciblé</a:t>
+            </a:r>
+          </a:p>
+        </p:txBody>
+      </p:sp>
+      <p:sp>
+        <p:nvSpPr>
+          <p:cNvPr id="5" name="TextBox 4"/>
+          <p:cNvSpPr txBox="1"/>
+          <p:nvPr/>
+        </p:nvSpPr>
+        <p:spPr>
+          <a:xfrm>
+            <a:off x="630936" y="1307592"/>
+            <a:ext cx="10972800" cy="384048"/>
+          </a:xfrm>
+          <a:prstGeom prst="rect">
+            <a:avLst/>
+          </a:prstGeom>
+          <a:noFill/>
+        </p:spPr>
+        <p:txBody>
+          <a:bodyPr wrap="square" lIns="18288" rIns="18288" tIns="9144" bIns="0">
+            <a:spAutoFit/>
+          </a:bodyPr>
+          <a:lstStyle/>
+          <a:p>
+            <a:pPr>
+              <a:defRPr sz="1300" b="0">
+                <a:solidFill>
+                  <a:srgbClr val="607069"/>
+                </a:solidFill>
+                <a:latin typeface="Inter"/>
+              </a:defRPr>
+            </a:pPr>
+            <a:r>
+              <a:t>Chaque fonctionnalité d’Alicia est rattachée à une brique et à un horizon de réalisation.</a:t>
+            </a:r>
+          </a:p>
+        </p:txBody>
+      </p:sp>
+      <p:sp>
+        <p:nvSpPr>
+          <p:cNvPr id="6" name="Rectangle 5"/>
+          <p:cNvSpPr/>
+          <p:nvPr/>
+        </p:nvSpPr>
+        <p:spPr>
+          <a:xfrm>
+            <a:off x="594360" y="6437376"/>
+            <a:ext cx="11018520" cy="13716"/>
+          </a:xfrm>
+          <a:prstGeom prst="rect">
+            <a:avLst/>
+          </a:prstGeom>
+          <a:solidFill>
+            <a:srgbClr val="E1E8E2"/>
+          </a:solidFill>
+          <a:ln>
+            <a:noFill/>
+          </a:ln>
+        </p:spPr>
+        <p:style>
+          <a:lnRef idx="1">
+            <a:schemeClr val="accent1"/>
+          </a:lnRef>
+          <a:fillRef idx="3">
+            <a:schemeClr val="accent1"/>
+          </a:fillRef>
+          <a:effectRef idx="2">
+            <a:schemeClr val="accent1"/>
+          </a:effectRef>
+          <a:fontRef idx="minor">
+            <a:schemeClr val="lt1"/>
+          </a:fontRef>
+        </p:style>
+        <p:txBody>
+          <a:bodyPr rtlCol="0" anchor="ctr"/>
+          <a:lstStyle/>
+          <a:p>
+            <a:pPr algn="ctr"/>
+          </a:p>
+        </p:txBody>
+      </p:sp>
+      <p:sp>
+        <p:nvSpPr>
+          <p:cNvPr id="7" name="TextBox 6"/>
+          <p:cNvSpPr txBox="1"/>
+          <p:nvPr/>
+        </p:nvSpPr>
+        <p:spPr>
+          <a:xfrm>
+            <a:off x="594360" y="6492240"/>
+            <a:ext cx="10058400" cy="155448"/>
+          </a:xfrm>
+          <a:prstGeom prst="rect">
+            <a:avLst/>
+          </a:prstGeom>
+          <a:noFill/>
+        </p:spPr>
+        <p:txBody>
+          <a:bodyPr wrap="square" lIns="18288" rIns="18288" tIns="9144" bIns="0">
+            <a:spAutoFit/>
+          </a:bodyPr>
+          <a:lstStyle/>
+          <a:p>
+            <a:pPr>
+              <a:defRPr sz="819" b="0">
+                <a:solidFill>
+                  <a:srgbClr val="607069"/>
+                </a:solidFill>
+                <a:latin typeface="Inter"/>
+              </a:defRPr>
+            </a:pPr>
+            <a:r>
+              <a:t>FASHION–INSTA  ·  BESOINS MÉTIER  /  TRAÇABILITÉ</a:t>
+            </a:r>
+          </a:p>
+        </p:txBody>
+      </p:sp>
+      <p:sp>
+        <p:nvSpPr>
+          <p:cNvPr id="8" name="TextBox 7"/>
+          <p:cNvSpPr txBox="1"/>
+          <p:nvPr/>
+        </p:nvSpPr>
+        <p:spPr>
+          <a:xfrm>
+            <a:off x="11091672" y="6464808"/>
+            <a:ext cx="457200" cy="182880"/>
+          </a:xfrm>
+          <a:prstGeom prst="rect">
+            <a:avLst/>
+          </a:prstGeom>
+          <a:noFill/>
+        </p:spPr>
+        <p:txBody>
+          <a:bodyPr wrap="square" lIns="18288" rIns="18288" tIns="9144" bIns="0">
+            <a:spAutoFit/>
+          </a:bodyPr>
+          <a:lstStyle/>
+          <a:p>
+            <a:pPr>
+              <a:defRPr sz="900" b="0">
+                <a:solidFill>
+                  <a:srgbClr val="607069"/>
+                </a:solidFill>
+                <a:latin typeface="Inter"/>
+              </a:defRPr>
+            </a:pPr>
+            <a:r>
+              <a:t>23</a:t>
+            </a:r>
+          </a:p>
+        </p:txBody>
+      </p:sp>
+      <p:sp>
+        <p:nvSpPr>
+          <p:cNvPr id="9" name="Rounded Rectangle 8"/>
+          <p:cNvSpPr/>
+          <p:nvPr/>
+        </p:nvSpPr>
+        <p:spPr>
+          <a:xfrm>
+            <a:off x="649224" y="1929384"/>
+            <a:ext cx="3621024" cy="3429000"/>
+          </a:xfrm>
+          <a:prstGeom prst="roundRect">
+            <a:avLst/>
+          </a:prstGeom>
+          <a:solidFill>
+            <a:srgbClr val="EFF7E9"/>
+          </a:solidFill>
+          <a:ln>
+            <a:noFill/>
+          </a:ln>
+        </p:spPr>
+        <p:style>
+          <a:lnRef idx="1">
+            <a:schemeClr val="accent1"/>
+          </a:lnRef>
+          <a:fillRef idx="3">
+            <a:schemeClr val="accent1"/>
+          </a:fillRef>
+          <a:effectRef idx="2">
+            <a:schemeClr val="accent1"/>
+          </a:effectRef>
+          <a:fontRef idx="minor">
+            <a:schemeClr val="lt1"/>
+          </a:fontRef>
+        </p:style>
+        <p:txBody>
+          <a:bodyPr rtlCol="0" anchor="ctr"/>
+          <a:lstStyle/>
+          <a:p>
+            <a:pPr algn="ctr"/>
+          </a:p>
+        </p:txBody>
+      </p:sp>
+      <p:sp>
+        <p:nvSpPr>
+          <p:cNvPr id="10" name="Rounded Rectangle 9"/>
+          <p:cNvSpPr/>
+          <p:nvPr/>
+        </p:nvSpPr>
+        <p:spPr>
+          <a:xfrm>
+            <a:off x="649224" y="1929384"/>
+            <a:ext cx="3621024" cy="484632"/>
+          </a:xfrm>
+          <a:prstGeom prst="roundRect">
+            <a:avLst/>
+          </a:prstGeom>
+          <a:solidFill>
+            <a:srgbClr val="82AE99"/>
+          </a:solidFill>
+          <a:ln>
+            <a:noFill/>
+          </a:ln>
+        </p:spPr>
+        <p:style>
+          <a:lnRef idx="1">
+            <a:schemeClr val="accent1"/>
+          </a:lnRef>
+          <a:fillRef idx="3">
+            <a:schemeClr val="accent1"/>
+          </a:fillRef>
+          <a:effectRef idx="2">
+            <a:schemeClr val="accent1"/>
+          </a:effectRef>
+          <a:fontRef idx="minor">
+            <a:schemeClr val="lt1"/>
+          </a:fontRef>
+        </p:style>
+        <p:txBody>
+          <a:bodyPr rtlCol="0" anchor="ctr"/>
+          <a:lstStyle/>
+          <a:p>
+            <a:pPr algn="ctr"/>
+          </a:p>
+        </p:txBody>
+      </p:sp>
+      <p:sp>
+        <p:nvSpPr>
+          <p:cNvPr id="11" name="TextBox 10"/>
+          <p:cNvSpPr txBox="1"/>
+          <p:nvPr/>
+        </p:nvSpPr>
+        <p:spPr>
+          <a:xfrm>
+            <a:off x="795528" y="2048256"/>
+            <a:ext cx="3355848" cy="265176"/>
+          </a:xfrm>
+          <a:prstGeom prst="rect">
+            <a:avLst/>
+          </a:prstGeom>
+          <a:noFill/>
+        </p:spPr>
+        <p:txBody>
+          <a:bodyPr wrap="square" lIns="18288" rIns="18288" tIns="9144" bIns="0">
+            <a:spAutoFit/>
+          </a:bodyPr>
+          <a:lstStyle/>
+          <a:p>
+            <a:pPr>
+              <a:defRPr sz="1200" b="1">
+                <a:solidFill>
+                  <a:srgbClr val="FFFFFF"/>
+                </a:solidFill>
+                <a:latin typeface="Inter"/>
+              </a:defRPr>
+            </a:pPr>
+            <a:r>
+              <a:t>POC · VALIDATION</a:t>
+            </a:r>
+          </a:p>
+        </p:txBody>
+      </p:sp>
+      <p:sp>
+        <p:nvSpPr>
+          <p:cNvPr id="12" name="Rounded Rectangle 11"/>
+          <p:cNvSpPr/>
+          <p:nvPr/>
+        </p:nvSpPr>
+        <p:spPr>
+          <a:xfrm>
+            <a:off x="822959" y="2729484"/>
+            <a:ext cx="100584" cy="100584"/>
+          </a:xfrm>
+          <a:prstGeom prst="roundRect">
+            <a:avLst/>
+          </a:prstGeom>
+          <a:solidFill>
+            <a:srgbClr val="82AE99"/>
+          </a:solidFill>
+          <a:ln>
+            <a:noFill/>
+          </a:ln>
+        </p:spPr>
+        <p:style>
+          <a:lnRef idx="1">
+            <a:schemeClr val="accent1"/>
+          </a:lnRef>
+          <a:fillRef idx="3">
+            <a:schemeClr val="accent1"/>
+          </a:fillRef>
+          <a:effectRef idx="2">
+            <a:schemeClr val="accent1"/>
+          </a:effectRef>
+          <a:fontRef idx="minor">
+            <a:schemeClr val="lt1"/>
+          </a:fontRef>
+        </p:style>
+        <p:txBody>
+          <a:bodyPr rtlCol="0" anchor="ctr"/>
+          <a:lstStyle/>
+          <a:p>
+            <a:pPr algn="ctr"/>
+          </a:p>
+        </p:txBody>
+      </p:sp>
+      <p:sp>
+        <p:nvSpPr>
+          <p:cNvPr id="13" name="TextBox 12"/>
+          <p:cNvSpPr txBox="1"/>
+          <p:nvPr/>
+        </p:nvSpPr>
+        <p:spPr>
+          <a:xfrm>
+            <a:off x="1033271" y="2688336"/>
+            <a:ext cx="3081528" cy="457200"/>
+          </a:xfrm>
+          <a:prstGeom prst="rect">
+            <a:avLst/>
+          </a:prstGeom>
+          <a:noFill/>
+        </p:spPr>
+        <p:txBody>
+          <a:bodyPr wrap="square" lIns="18288" rIns="18288" tIns="9144" bIns="0">
+            <a:spAutoFit/>
+          </a:bodyPr>
+          <a:lstStyle/>
+          <a:p>
+            <a:pPr>
+              <a:defRPr sz="1230" b="0">
+                <a:solidFill>
+                  <a:srgbClr val="17221F"/>
+                </a:solidFill>
+                <a:latin typeface="Inter"/>
+              </a:defRPr>
+            </a:pPr>
+            <a:r>
+              <a:t>Photo vêtement → embedding</a:t>
+            </a:r>
+          </a:p>
+        </p:txBody>
+      </p:sp>
+      <p:sp>
+        <p:nvSpPr>
+          <p:cNvPr id="14" name="Rounded Rectangle 13"/>
+          <p:cNvSpPr/>
+          <p:nvPr/>
+        </p:nvSpPr>
+        <p:spPr>
+          <a:xfrm>
+            <a:off x="822959" y="3259836"/>
+            <a:ext cx="100584" cy="100584"/>
+          </a:xfrm>
+          <a:prstGeom prst="roundRect">
+            <a:avLst/>
+          </a:prstGeom>
+          <a:solidFill>
+            <a:srgbClr val="82AE99"/>
+          </a:solidFill>
+          <a:ln>
+            <a:noFill/>
+          </a:ln>
+        </p:spPr>
+        <p:style>
+          <a:lnRef idx="1">
+            <a:schemeClr val="accent1"/>
+          </a:lnRef>
+          <a:fillRef idx="3">
+            <a:schemeClr val="accent1"/>
+          </a:fillRef>
+          <a:effectRef idx="2">
+            <a:schemeClr val="accent1"/>
+          </a:effectRef>
+          <a:fontRef idx="minor">
+            <a:schemeClr val="lt1"/>
+          </a:fontRef>
+        </p:style>
+        <p:txBody>
+          <a:bodyPr rtlCol="0" anchor="ctr"/>
+          <a:lstStyle/>
+          <a:p>
+            <a:pPr algn="ctr"/>
+          </a:p>
+        </p:txBody>
+      </p:sp>
+      <p:sp>
+        <p:nvSpPr>
+          <p:cNvPr id="15" name="TextBox 14"/>
+          <p:cNvSpPr txBox="1"/>
+          <p:nvPr/>
+        </p:nvSpPr>
+        <p:spPr>
+          <a:xfrm>
+            <a:off x="1033271" y="3218688"/>
+            <a:ext cx="3081528" cy="457200"/>
+          </a:xfrm>
+          <a:prstGeom prst="rect">
+            <a:avLst/>
+          </a:prstGeom>
+          <a:noFill/>
+        </p:spPr>
+        <p:txBody>
+          <a:bodyPr wrap="square" lIns="18288" rIns="18288" tIns="9144" bIns="0">
+            <a:spAutoFit/>
+          </a:bodyPr>
+          <a:lstStyle/>
+          <a:p>
+            <a:pPr>
+              <a:defRPr sz="1230" b="0">
+                <a:solidFill>
+                  <a:srgbClr val="17221F"/>
+                </a:solidFill>
+                <a:latin typeface="Inter"/>
+              </a:defRPr>
+            </a:pPr>
+            <a:r>
+              <a:t>Top 5 de références distinctes</a:t>
+            </a:r>
+          </a:p>
+        </p:txBody>
+      </p:sp>
+      <p:sp>
+        <p:nvSpPr>
+          <p:cNvPr id="16" name="Rounded Rectangle 15"/>
+          <p:cNvSpPr/>
+          <p:nvPr/>
+        </p:nvSpPr>
+        <p:spPr>
+          <a:xfrm>
+            <a:off x="822959" y="3790187"/>
+            <a:ext cx="100584" cy="100584"/>
+          </a:xfrm>
+          <a:prstGeom prst="roundRect">
+            <a:avLst/>
+          </a:prstGeom>
+          <a:solidFill>
+            <a:srgbClr val="82AE99"/>
+          </a:solidFill>
+          <a:ln>
+            <a:noFill/>
+          </a:ln>
+        </p:spPr>
+        <p:style>
+          <a:lnRef idx="1">
+            <a:schemeClr val="accent1"/>
+          </a:lnRef>
+          <a:fillRef idx="3">
+            <a:schemeClr val="accent1"/>
+          </a:fillRef>
+          <a:effectRef idx="2">
+            <a:schemeClr val="accent1"/>
+          </a:effectRef>
+          <a:fontRef idx="minor">
+            <a:schemeClr val="lt1"/>
+          </a:fontRef>
+        </p:style>
+        <p:txBody>
+          <a:bodyPr rtlCol="0" anchor="ctr"/>
+          <a:lstStyle/>
+          <a:p>
+            <a:pPr algn="ctr"/>
+          </a:p>
+        </p:txBody>
+      </p:sp>
+      <p:sp>
+        <p:nvSpPr>
+          <p:cNvPr id="17" name="TextBox 16"/>
+          <p:cNvSpPr txBox="1"/>
+          <p:nvPr/>
+        </p:nvSpPr>
+        <p:spPr>
+          <a:xfrm>
+            <a:off x="1033271" y="3749039"/>
+            <a:ext cx="3081528" cy="457200"/>
+          </a:xfrm>
+          <a:prstGeom prst="rect">
+            <a:avLst/>
+          </a:prstGeom>
+          <a:noFill/>
+        </p:spPr>
+        <p:txBody>
+          <a:bodyPr wrap="square" lIns="18288" rIns="18288" tIns="9144" bIns="0">
+            <a:spAutoFit/>
+          </a:bodyPr>
+          <a:lstStyle/>
+          <a:p>
+            <a:pPr>
+              <a:defRPr sz="1230" b="0">
+                <a:solidFill>
+                  <a:srgbClr val="17221F"/>
+                </a:solidFill>
+                <a:latin typeface="Inter"/>
+              </a:defRPr>
+            </a:pPr>
+            <a:r>
+              <a:t>Baseline tags vs IA</a:t>
+            </a:r>
+          </a:p>
+        </p:txBody>
+      </p:sp>
+      <p:sp>
+        <p:nvSpPr>
+          <p:cNvPr id="18" name="Rounded Rectangle 17"/>
+          <p:cNvSpPr/>
+          <p:nvPr/>
+        </p:nvSpPr>
+        <p:spPr>
+          <a:xfrm>
+            <a:off x="822959" y="4320540"/>
+            <a:ext cx="100584" cy="100584"/>
+          </a:xfrm>
+          <a:prstGeom prst="roundRect">
+            <a:avLst/>
+          </a:prstGeom>
+          <a:solidFill>
+            <a:srgbClr val="82AE99"/>
+          </a:solidFill>
+          <a:ln>
+            <a:noFill/>
+          </a:ln>
+        </p:spPr>
+        <p:style>
+          <a:lnRef idx="1">
+            <a:schemeClr val="accent1"/>
+          </a:lnRef>
+          <a:fillRef idx="3">
+            <a:schemeClr val="accent1"/>
+          </a:fillRef>
+          <a:effectRef idx="2">
+            <a:schemeClr val="accent1"/>
+          </a:effectRef>
+          <a:fontRef idx="minor">
+            <a:schemeClr val="lt1"/>
+          </a:fontRef>
+        </p:style>
+        <p:txBody>
+          <a:bodyPr rtlCol="0" anchor="ctr"/>
+          <a:lstStyle/>
+          <a:p>
+            <a:pPr algn="ctr"/>
+          </a:p>
+        </p:txBody>
+      </p:sp>
+      <p:sp>
+        <p:nvSpPr>
+          <p:cNvPr id="19" name="TextBox 18"/>
+          <p:cNvSpPr txBox="1"/>
+          <p:nvPr/>
+        </p:nvSpPr>
+        <p:spPr>
+          <a:xfrm>
+            <a:off x="1033271" y="4279392"/>
+            <a:ext cx="3081528" cy="457200"/>
+          </a:xfrm>
+          <a:prstGeom prst="rect">
+            <a:avLst/>
+          </a:prstGeom>
+          <a:noFill/>
+        </p:spPr>
+        <p:txBody>
+          <a:bodyPr wrap="square" lIns="18288" rIns="18288" tIns="9144" bIns="0">
+            <a:spAutoFit/>
+          </a:bodyPr>
+          <a:lstStyle/>
+          <a:p>
+            <a:pPr>
+              <a:defRPr sz="1230" b="0">
+                <a:solidFill>
+                  <a:srgbClr val="17221F"/>
+                </a:solidFill>
+                <a:latin typeface="Inter"/>
+              </a:defRPr>
+            </a:pPr>
+            <a:r>
+              <a:t>40 photos · jugement métier</a:t>
+            </a:r>
+          </a:p>
+        </p:txBody>
+      </p:sp>
+      <p:sp>
+        <p:nvSpPr>
+          <p:cNvPr id="20" name="TextBox 19"/>
+          <p:cNvSpPr txBox="1"/>
+          <p:nvPr/>
+        </p:nvSpPr>
+        <p:spPr>
+          <a:xfrm>
+            <a:off x="832103" y="4910328"/>
+            <a:ext cx="3246120" cy="320040"/>
+          </a:xfrm>
+          <a:prstGeom prst="rect">
+            <a:avLst/>
+          </a:prstGeom>
+          <a:noFill/>
+        </p:spPr>
+        <p:txBody>
+          <a:bodyPr wrap="square" lIns="18288" rIns="18288" tIns="9144" bIns="0">
+            <a:spAutoFit/>
+          </a:bodyPr>
+          <a:lstStyle/>
+          <a:p>
+            <a:pPr>
+              <a:defRPr sz="1000" b="1">
+                <a:solidFill>
+                  <a:srgbClr val="607069"/>
+                </a:solidFill>
+                <a:latin typeface="Inter"/>
+              </a:defRPr>
+            </a:pPr>
+            <a:r>
+              <a:t>120 pantalons / jeans</a:t>
+            </a:r>
+          </a:p>
+        </p:txBody>
+      </p:sp>
+      <p:sp>
+        <p:nvSpPr>
+          <p:cNvPr id="21" name="Rounded Rectangle 20"/>
+          <p:cNvSpPr/>
+          <p:nvPr/>
+        </p:nvSpPr>
+        <p:spPr>
+          <a:xfrm>
+            <a:off x="4471416" y="1929384"/>
+            <a:ext cx="3621024" cy="3429000"/>
+          </a:xfrm>
+          <a:prstGeom prst="roundRect">
+            <a:avLst/>
+          </a:prstGeom>
+          <a:solidFill>
+            <a:srgbClr val="EFF7E9"/>
+          </a:solidFill>
+          <a:ln>
+            <a:noFill/>
+          </a:ln>
+        </p:spPr>
+        <p:style>
+          <a:lnRef idx="1">
+            <a:schemeClr val="accent1"/>
+          </a:lnRef>
+          <a:fillRef idx="3">
+            <a:schemeClr val="accent1"/>
+          </a:fillRef>
+          <a:effectRef idx="2">
+            <a:schemeClr val="accent1"/>
+          </a:effectRef>
+          <a:fontRef idx="minor">
+            <a:schemeClr val="lt1"/>
+          </a:fontRef>
+        </p:style>
+        <p:txBody>
+          <a:bodyPr rtlCol="0" anchor="ctr"/>
+          <a:lstStyle/>
+          <a:p>
+            <a:pPr algn="ctr"/>
+          </a:p>
+        </p:txBody>
+      </p:sp>
+      <p:sp>
+        <p:nvSpPr>
+          <p:cNvPr id="22" name="Rounded Rectangle 21"/>
+          <p:cNvSpPr/>
+          <p:nvPr/>
+        </p:nvSpPr>
+        <p:spPr>
+          <a:xfrm>
+            <a:off x="4471416" y="1929384"/>
+            <a:ext cx="3621024" cy="484632"/>
+          </a:xfrm>
+          <a:prstGeom prst="roundRect">
+            <a:avLst/>
+          </a:prstGeom>
+          <a:solidFill>
+            <a:srgbClr val="5D8F77"/>
+          </a:solidFill>
+          <a:ln>
+            <a:noFill/>
+          </a:ln>
+        </p:spPr>
+        <p:style>
+          <a:lnRef idx="1">
+            <a:schemeClr val="accent1"/>
+          </a:lnRef>
+          <a:fillRef idx="3">
+            <a:schemeClr val="accent1"/>
+          </a:fillRef>
+          <a:effectRef idx="2">
+            <a:schemeClr val="accent1"/>
+          </a:effectRef>
+          <a:fontRef idx="minor">
+            <a:schemeClr val="lt1"/>
+          </a:fontRef>
+        </p:style>
+        <p:txBody>
+          <a:bodyPr rtlCol="0" anchor="ctr"/>
+          <a:lstStyle/>
+          <a:p>
+            <a:pPr algn="ctr"/>
+          </a:p>
+        </p:txBody>
+      </p:sp>
+      <p:sp>
+        <p:nvSpPr>
+          <p:cNvPr id="23" name="TextBox 22"/>
+          <p:cNvSpPr txBox="1"/>
+          <p:nvPr/>
+        </p:nvSpPr>
+        <p:spPr>
+          <a:xfrm>
+            <a:off x="4617720" y="2048256"/>
+            <a:ext cx="3355848" cy="265176"/>
+          </a:xfrm>
+          <a:prstGeom prst="rect">
+            <a:avLst/>
+          </a:prstGeom>
+          <a:noFill/>
+        </p:spPr>
+        <p:txBody>
+          <a:bodyPr wrap="square" lIns="18288" rIns="18288" tIns="9144" bIns="0">
+            <a:spAutoFit/>
+          </a:bodyPr>
+          <a:lstStyle/>
+          <a:p>
+            <a:pPr>
+              <a:defRPr sz="1200" b="1">
+                <a:solidFill>
+                  <a:srgbClr val="FFFFFF"/>
+                </a:solidFill>
+                <a:latin typeface="Inter"/>
+              </a:defRPr>
+            </a:pPr>
+            <a:r>
+              <a:t>MVP · INDUSTRIALISATION</a:t>
+            </a:r>
+          </a:p>
+        </p:txBody>
+      </p:sp>
+      <p:sp>
+        <p:nvSpPr>
+          <p:cNvPr id="24" name="Rounded Rectangle 23"/>
+          <p:cNvSpPr/>
+          <p:nvPr/>
+        </p:nvSpPr>
+        <p:spPr>
+          <a:xfrm>
+            <a:off x="4645152" y="2729484"/>
+            <a:ext cx="100584" cy="100584"/>
+          </a:xfrm>
+          <a:prstGeom prst="roundRect">
+            <a:avLst/>
+          </a:prstGeom>
+          <a:solidFill>
+            <a:srgbClr val="5D8F77"/>
+          </a:solidFill>
+          <a:ln>
+            <a:noFill/>
+          </a:ln>
+        </p:spPr>
+        <p:style>
+          <a:lnRef idx="1">
+            <a:schemeClr val="accent1"/>
+          </a:lnRef>
+          <a:fillRef idx="3">
+            <a:schemeClr val="accent1"/>
+          </a:fillRef>
+          <a:effectRef idx="2">
+            <a:schemeClr val="accent1"/>
+          </a:effectRef>
+          <a:fontRef idx="minor">
+            <a:schemeClr val="lt1"/>
+          </a:fontRef>
+        </p:style>
+        <p:txBody>
+          <a:bodyPr rtlCol="0" anchor="ctr"/>
+          <a:lstStyle/>
+          <a:p>
+            <a:pPr algn="ctr"/>
+          </a:p>
+        </p:txBody>
+      </p:sp>
+      <p:sp>
+        <p:nvSpPr>
+          <p:cNvPr id="25" name="TextBox 24"/>
+          <p:cNvSpPr txBox="1"/>
+          <p:nvPr/>
+        </p:nvSpPr>
+        <p:spPr>
+          <a:xfrm>
+            <a:off x="4855464" y="2688336"/>
+            <a:ext cx="3081528" cy="457200"/>
+          </a:xfrm>
+          <a:prstGeom prst="rect">
+            <a:avLst/>
+          </a:prstGeom>
+          <a:noFill/>
+        </p:spPr>
+        <p:txBody>
+          <a:bodyPr wrap="square" lIns="18288" rIns="18288" tIns="9144" bIns="0">
+            <a:spAutoFit/>
+          </a:bodyPr>
+          <a:lstStyle/>
+          <a:p>
+            <a:pPr>
+              <a:defRPr sz="1230" b="0">
+                <a:solidFill>
+                  <a:srgbClr val="17221F"/>
+                </a:solidFill>
+                <a:latin typeface="Inter"/>
+              </a:defRPr>
+            </a:pPr>
+            <a:r>
+              <a:t>Catalogue multi-catégories + stocks</a:t>
+            </a:r>
+          </a:p>
+        </p:txBody>
+      </p:sp>
+      <p:sp>
+        <p:nvSpPr>
+          <p:cNvPr id="26" name="Rounded Rectangle 25"/>
+          <p:cNvSpPr/>
+          <p:nvPr/>
+        </p:nvSpPr>
+        <p:spPr>
+          <a:xfrm>
+            <a:off x="4645152" y="3259836"/>
+            <a:ext cx="100584" cy="100584"/>
+          </a:xfrm>
+          <a:prstGeom prst="roundRect">
+            <a:avLst/>
+          </a:prstGeom>
+          <a:solidFill>
+            <a:srgbClr val="5D8F77"/>
+          </a:solidFill>
+          <a:ln>
+            <a:noFill/>
+          </a:ln>
+        </p:spPr>
+        <p:style>
+          <a:lnRef idx="1">
+            <a:schemeClr val="accent1"/>
+          </a:lnRef>
+          <a:fillRef idx="3">
+            <a:schemeClr val="accent1"/>
+          </a:fillRef>
+          <a:effectRef idx="2">
+            <a:schemeClr val="accent1"/>
+          </a:effectRef>
+          <a:fontRef idx="minor">
+            <a:schemeClr val="lt1"/>
+          </a:fontRef>
+        </p:style>
+        <p:txBody>
+          <a:bodyPr rtlCol="0" anchor="ctr"/>
+          <a:lstStyle/>
+          <a:p>
+            <a:pPr algn="ctr"/>
+          </a:p>
+        </p:txBody>
+      </p:sp>
+      <p:sp>
+        <p:nvSpPr>
+          <p:cNvPr id="27" name="TextBox 26"/>
+          <p:cNvSpPr txBox="1"/>
+          <p:nvPr/>
+        </p:nvSpPr>
+        <p:spPr>
+          <a:xfrm>
+            <a:off x="4855464" y="3218688"/>
+            <a:ext cx="3081528" cy="457200"/>
+          </a:xfrm>
+          <a:prstGeom prst="rect">
+            <a:avLst/>
+          </a:prstGeom>
+          <a:noFill/>
+        </p:spPr>
+        <p:txBody>
+          <a:bodyPr wrap="square" lIns="18288" rIns="18288" tIns="9144" bIns="0">
+            <a:spAutoFit/>
+          </a:bodyPr>
+          <a:lstStyle/>
+          <a:p>
+            <a:pPr>
+              <a:defRPr sz="1230" b="0">
+                <a:solidFill>
+                  <a:srgbClr val="17221F"/>
+                </a:solidFill>
+                <a:latin typeface="Inter"/>
+              </a:defRPr>
+            </a:pPr>
+            <a:r>
+              <a:t>Préférences styles / marques</a:t>
+            </a:r>
+          </a:p>
+        </p:txBody>
+      </p:sp>
+      <p:sp>
+        <p:nvSpPr>
+          <p:cNvPr id="28" name="Rounded Rectangle 27"/>
+          <p:cNvSpPr/>
+          <p:nvPr/>
+        </p:nvSpPr>
+        <p:spPr>
+          <a:xfrm>
+            <a:off x="4645152" y="3790187"/>
+            <a:ext cx="100584" cy="100584"/>
+          </a:xfrm>
+          <a:prstGeom prst="roundRect">
+            <a:avLst/>
+          </a:prstGeom>
+          <a:solidFill>
+            <a:srgbClr val="5D8F77"/>
+          </a:solidFill>
+          <a:ln>
+            <a:noFill/>
+          </a:ln>
+        </p:spPr>
+        <p:style>
+          <a:lnRef idx="1">
+            <a:schemeClr val="accent1"/>
+          </a:lnRef>
+          <a:fillRef idx="3">
+            <a:schemeClr val="accent1"/>
+          </a:fillRef>
+          <a:effectRef idx="2">
+            <a:schemeClr val="accent1"/>
+          </a:effectRef>
+          <a:fontRef idx="minor">
+            <a:schemeClr val="lt1"/>
+          </a:fontRef>
+        </p:style>
+        <p:txBody>
+          <a:bodyPr rtlCol="0" anchor="ctr"/>
+          <a:lstStyle/>
+          <a:p>
+            <a:pPr algn="ctr"/>
+          </a:p>
+        </p:txBody>
+      </p:sp>
+      <p:sp>
+        <p:nvSpPr>
+          <p:cNvPr id="29" name="TextBox 28"/>
+          <p:cNvSpPr txBox="1"/>
+          <p:nvPr/>
+        </p:nvSpPr>
+        <p:spPr>
+          <a:xfrm>
+            <a:off x="4855464" y="3749039"/>
+            <a:ext cx="3081528" cy="457200"/>
+          </a:xfrm>
+          <a:prstGeom prst="rect">
+            <a:avLst/>
+          </a:prstGeom>
+          <a:noFill/>
+        </p:spPr>
+        <p:txBody>
+          <a:bodyPr wrap="square" lIns="18288" rIns="18288" tIns="9144" bIns="0">
+            <a:spAutoFit/>
+          </a:bodyPr>
+          <a:lstStyle/>
+          <a:p>
+            <a:pPr>
+              <a:defRPr sz="1230" b="0">
+                <a:solidFill>
+                  <a:srgbClr val="17221F"/>
+                </a:solidFill>
+                <a:latin typeface="Inter"/>
+              </a:defRPr>
+            </a:pPr>
+            <a:r>
+              <a:t>Feedback utilisateur</a:t>
+            </a:r>
+          </a:p>
+        </p:txBody>
+      </p:sp>
+      <p:sp>
+        <p:nvSpPr>
+          <p:cNvPr id="30" name="Rounded Rectangle 29"/>
+          <p:cNvSpPr/>
+          <p:nvPr/>
+        </p:nvSpPr>
+        <p:spPr>
+          <a:xfrm>
+            <a:off x="4645152" y="4320540"/>
+            <a:ext cx="100584" cy="100584"/>
+          </a:xfrm>
+          <a:prstGeom prst="roundRect">
+            <a:avLst/>
+          </a:prstGeom>
+          <a:solidFill>
+            <a:srgbClr val="5D8F77"/>
+          </a:solidFill>
+          <a:ln>
+            <a:noFill/>
+          </a:ln>
+        </p:spPr>
+        <p:style>
+          <a:lnRef idx="1">
+            <a:schemeClr val="accent1"/>
+          </a:lnRef>
+          <a:fillRef idx="3">
+            <a:schemeClr val="accent1"/>
+          </a:fillRef>
+          <a:effectRef idx="2">
+            <a:schemeClr val="accent1"/>
+          </a:effectRef>
+          <a:fontRef idx="minor">
+            <a:schemeClr val="lt1"/>
+          </a:fontRef>
+        </p:style>
+        <p:txBody>
+          <a:bodyPr rtlCol="0" anchor="ctr"/>
+          <a:lstStyle/>
+          <a:p>
+            <a:pPr algn="ctr"/>
+          </a:p>
+        </p:txBody>
+      </p:sp>
+      <p:sp>
+        <p:nvSpPr>
+          <p:cNvPr id="31" name="TextBox 30"/>
+          <p:cNvSpPr txBox="1"/>
+          <p:nvPr/>
+        </p:nvSpPr>
+        <p:spPr>
+          <a:xfrm>
+            <a:off x="4855464" y="4279392"/>
+            <a:ext cx="3081528" cy="457200"/>
+          </a:xfrm>
+          <a:prstGeom prst="rect">
+            <a:avLst/>
+          </a:prstGeom>
+          <a:noFill/>
+        </p:spPr>
+        <p:txBody>
+          <a:bodyPr wrap="square" lIns="18288" rIns="18288" tIns="9144" bIns="0">
+            <a:spAutoFit/>
+          </a:bodyPr>
+          <a:lstStyle/>
+          <a:p>
+            <a:pPr>
+              <a:defRPr sz="1230" b="0">
+                <a:solidFill>
+                  <a:srgbClr val="17221F"/>
+                </a:solidFill>
+                <a:latin typeface="Inter"/>
+              </a:defRPr>
+            </a:pPr>
+            <a:r>
+              <a:t>API IA, monitoring, sécurité</a:t>
+            </a:r>
+          </a:p>
+        </p:txBody>
+      </p:sp>
+      <p:sp>
+        <p:nvSpPr>
+          <p:cNvPr id="32" name="TextBox 31"/>
+          <p:cNvSpPr txBox="1"/>
+          <p:nvPr/>
+        </p:nvSpPr>
+        <p:spPr>
+          <a:xfrm>
+            <a:off x="4654296" y="4910328"/>
+            <a:ext cx="3246120" cy="320040"/>
+          </a:xfrm>
+          <a:prstGeom prst="rect">
+            <a:avLst/>
+          </a:prstGeom>
+          <a:noFill/>
+        </p:spPr>
+        <p:txBody>
+          <a:bodyPr wrap="square" lIns="18288" rIns="18288" tIns="9144" bIns="0">
+            <a:spAutoFit/>
+          </a:bodyPr>
+          <a:lstStyle/>
+          <a:p>
+            <a:pPr>
+              <a:defRPr sz="1000" b="1">
+                <a:solidFill>
+                  <a:srgbClr val="607069"/>
+                </a:solidFill>
+                <a:latin typeface="Inter"/>
+              </a:defRPr>
+            </a:pPr>
+            <a:r>
+              <a:t>Fonctions Software supposées acquises</a:t>
+            </a:r>
+          </a:p>
+        </p:txBody>
+      </p:sp>
+      <p:sp>
+        <p:nvSpPr>
+          <p:cNvPr id="33" name="Rounded Rectangle 32"/>
+          <p:cNvSpPr/>
+          <p:nvPr/>
+        </p:nvSpPr>
+        <p:spPr>
+          <a:xfrm>
+            <a:off x="8293608" y="1929384"/>
+            <a:ext cx="3621024" cy="3429000"/>
+          </a:xfrm>
+          <a:prstGeom prst="roundRect">
+            <a:avLst/>
+          </a:prstGeom>
+          <a:solidFill>
+            <a:srgbClr val="EFF7E9"/>
+          </a:solidFill>
+          <a:ln>
+            <a:noFill/>
+          </a:ln>
+        </p:spPr>
+        <p:style>
+          <a:lnRef idx="1">
+            <a:schemeClr val="accent1"/>
+          </a:lnRef>
+          <a:fillRef idx="3">
+            <a:schemeClr val="accent1"/>
+          </a:fillRef>
+          <a:effectRef idx="2">
+            <a:schemeClr val="accent1"/>
+          </a:effectRef>
+          <a:fontRef idx="minor">
+            <a:schemeClr val="lt1"/>
+          </a:fontRef>
+        </p:style>
+        <p:txBody>
+          <a:bodyPr rtlCol="0" anchor="ctr"/>
+          <a:lstStyle/>
+          <a:p>
+            <a:pPr algn="ctr"/>
+          </a:p>
+        </p:txBody>
+      </p:sp>
+      <p:sp>
+        <p:nvSpPr>
+          <p:cNvPr id="34" name="Rounded Rectangle 33"/>
+          <p:cNvSpPr/>
+          <p:nvPr/>
+        </p:nvSpPr>
+        <p:spPr>
+          <a:xfrm>
+            <a:off x="8293608" y="1929384"/>
+            <a:ext cx="3621024" cy="484632"/>
+          </a:xfrm>
+          <a:prstGeom prst="roundRect">
+            <a:avLst/>
+          </a:prstGeom>
+          <a:solidFill>
+            <a:srgbClr val="416954"/>
+          </a:solidFill>
+          <a:ln>
+            <a:noFill/>
+          </a:ln>
+        </p:spPr>
+        <p:style>
+          <a:lnRef idx="1">
+            <a:schemeClr val="accent1"/>
+          </a:lnRef>
+          <a:fillRef idx="3">
+            <a:schemeClr val="accent1"/>
+          </a:fillRef>
+          <a:effectRef idx="2">
+            <a:schemeClr val="accent1"/>
+          </a:effectRef>
+          <a:fontRef idx="minor">
+            <a:schemeClr val="lt1"/>
+          </a:fontRef>
+        </p:style>
+        <p:txBody>
+          <a:bodyPr rtlCol="0" anchor="ctr"/>
+          <a:lstStyle/>
+          <a:p>
+            <a:pPr algn="ctr"/>
+          </a:p>
+        </p:txBody>
+      </p:sp>
+      <p:sp>
+        <p:nvSpPr>
+          <p:cNvPr id="35" name="TextBox 34"/>
+          <p:cNvSpPr txBox="1"/>
+          <p:nvPr/>
+        </p:nvSpPr>
+        <p:spPr>
+          <a:xfrm>
+            <a:off x="8439912" y="2048256"/>
+            <a:ext cx="3355848" cy="265176"/>
+          </a:xfrm>
+          <a:prstGeom prst="rect">
+            <a:avLst/>
+          </a:prstGeom>
+          <a:noFill/>
+        </p:spPr>
+        <p:txBody>
+          <a:bodyPr wrap="square" lIns="18288" rIns="18288" tIns="9144" bIns="0">
+            <a:spAutoFit/>
+          </a:bodyPr>
+          <a:lstStyle/>
+          <a:p>
+            <a:pPr>
+              <a:defRPr sz="1200" b="1">
+                <a:solidFill>
+                  <a:srgbClr val="FFFFFF"/>
+                </a:solidFill>
+                <a:latin typeface="Inter"/>
+              </a:defRPr>
+            </a:pPr>
+            <a:r>
+              <a:t>ÉVOLUTIONS · À CHIFFRER</a:t>
+            </a:r>
+          </a:p>
+        </p:txBody>
+      </p:sp>
+      <p:sp>
+        <p:nvSpPr>
+          <p:cNvPr id="36" name="Rounded Rectangle 35"/>
+          <p:cNvSpPr/>
+          <p:nvPr/>
+        </p:nvSpPr>
+        <p:spPr>
+          <a:xfrm>
+            <a:off x="8467344" y="2729484"/>
+            <a:ext cx="100584" cy="100584"/>
+          </a:xfrm>
+          <a:prstGeom prst="roundRect">
+            <a:avLst/>
+          </a:prstGeom>
+          <a:solidFill>
+            <a:srgbClr val="416954"/>
+          </a:solidFill>
+          <a:ln>
+            <a:noFill/>
+          </a:ln>
+        </p:spPr>
+        <p:style>
+          <a:lnRef idx="1">
+            <a:schemeClr val="accent1"/>
+          </a:lnRef>
+          <a:fillRef idx="3">
+            <a:schemeClr val="accent1"/>
+          </a:fillRef>
+          <a:effectRef idx="2">
+            <a:schemeClr val="accent1"/>
+          </a:effectRef>
+          <a:fontRef idx="minor">
+            <a:schemeClr val="lt1"/>
+          </a:fontRef>
+        </p:style>
+        <p:txBody>
+          <a:bodyPr rtlCol="0" anchor="ctr"/>
+          <a:lstStyle/>
+          <a:p>
+            <a:pPr algn="ctr"/>
+          </a:p>
+        </p:txBody>
+      </p:sp>
+      <p:sp>
+        <p:nvSpPr>
+          <p:cNvPr id="37" name="TextBox 36"/>
+          <p:cNvSpPr txBox="1"/>
+          <p:nvPr/>
+        </p:nvSpPr>
+        <p:spPr>
+          <a:xfrm>
+            <a:off x="8677656" y="2688336"/>
+            <a:ext cx="3081528" cy="457200"/>
+          </a:xfrm>
+          <a:prstGeom prst="rect">
+            <a:avLst/>
+          </a:prstGeom>
+          <a:noFill/>
+        </p:spPr>
+        <p:txBody>
+          <a:bodyPr wrap="square" lIns="18288" rIns="18288" tIns="9144" bIns="0">
+            <a:spAutoFit/>
+          </a:bodyPr>
+          <a:lstStyle/>
+          <a:p>
+            <a:pPr>
+              <a:defRPr sz="1230" b="0">
+                <a:solidFill>
+                  <a:srgbClr val="17221F"/>
+                </a:solidFill>
+                <a:latin typeface="Inter"/>
+              </a:defRPr>
+            </a:pPr>
+            <a:r>
+              <a:t>Garde-robe / photos conservées</a:t>
+            </a:r>
+          </a:p>
+        </p:txBody>
+      </p:sp>
+      <p:sp>
+        <p:nvSpPr>
+          <p:cNvPr id="38" name="Rounded Rectangle 37"/>
+          <p:cNvSpPr/>
+          <p:nvPr/>
+        </p:nvSpPr>
+        <p:spPr>
+          <a:xfrm>
+            <a:off x="8467344" y="3259836"/>
+            <a:ext cx="100584" cy="100584"/>
+          </a:xfrm>
+          <a:prstGeom prst="roundRect">
+            <a:avLst/>
+          </a:prstGeom>
+          <a:solidFill>
+            <a:srgbClr val="416954"/>
+          </a:solidFill>
+          <a:ln>
+            <a:noFill/>
+          </a:ln>
+        </p:spPr>
+        <p:style>
+          <a:lnRef idx="1">
+            <a:schemeClr val="accent1"/>
+          </a:lnRef>
+          <a:fillRef idx="3">
+            <a:schemeClr val="accent1"/>
+          </a:fillRef>
+          <a:effectRef idx="2">
+            <a:schemeClr val="accent1"/>
+          </a:effectRef>
+          <a:fontRef idx="minor">
+            <a:schemeClr val="lt1"/>
+          </a:fontRef>
+        </p:style>
+        <p:txBody>
+          <a:bodyPr rtlCol="0" anchor="ctr"/>
+          <a:lstStyle/>
+          <a:p>
+            <a:pPr algn="ctr"/>
+          </a:p>
+        </p:txBody>
+      </p:sp>
+      <p:sp>
+        <p:nvSpPr>
+          <p:cNvPr id="39" name="TextBox 38"/>
+          <p:cNvSpPr txBox="1"/>
+          <p:nvPr/>
+        </p:nvSpPr>
+        <p:spPr>
+          <a:xfrm>
+            <a:off x="8677656" y="3218688"/>
+            <a:ext cx="3081528" cy="457200"/>
+          </a:xfrm>
+          <a:prstGeom prst="rect">
+            <a:avLst/>
+          </a:prstGeom>
+          <a:noFill/>
+        </p:spPr>
+        <p:txBody>
+          <a:bodyPr wrap="square" lIns="18288" rIns="18288" tIns="9144" bIns="0">
+            <a:spAutoFit/>
+          </a:bodyPr>
+          <a:lstStyle/>
+          <a:p>
+            <a:pPr>
+              <a:defRPr sz="1230" b="0">
+                <a:solidFill>
+                  <a:srgbClr val="17221F"/>
+                </a:solidFill>
+                <a:latin typeface="Inter"/>
+              </a:defRPr>
+            </a:pPr>
+            <a:r>
+              <a:t>Essayage virtuel génératif</a:t>
+            </a:r>
+          </a:p>
+        </p:txBody>
+      </p:sp>
+      <p:sp>
+        <p:nvSpPr>
+          <p:cNvPr id="40" name="Rounded Rectangle 39"/>
+          <p:cNvSpPr/>
+          <p:nvPr/>
+        </p:nvSpPr>
+        <p:spPr>
+          <a:xfrm>
+            <a:off x="8467344" y="3790187"/>
+            <a:ext cx="100584" cy="100584"/>
+          </a:xfrm>
+          <a:prstGeom prst="roundRect">
+            <a:avLst/>
+          </a:prstGeom>
+          <a:solidFill>
+            <a:srgbClr val="416954"/>
+          </a:solidFill>
+          <a:ln>
+            <a:noFill/>
+          </a:ln>
+        </p:spPr>
+        <p:style>
+          <a:lnRef idx="1">
+            <a:schemeClr val="accent1"/>
+          </a:lnRef>
+          <a:fillRef idx="3">
+            <a:schemeClr val="accent1"/>
+          </a:fillRef>
+          <a:effectRef idx="2">
+            <a:schemeClr val="accent1"/>
+          </a:effectRef>
+          <a:fontRef idx="minor">
+            <a:schemeClr val="lt1"/>
+          </a:fontRef>
+        </p:style>
+        <p:txBody>
+          <a:bodyPr rtlCol="0" anchor="ctr"/>
+          <a:lstStyle/>
+          <a:p>
+            <a:pPr algn="ctr"/>
+          </a:p>
+        </p:txBody>
+      </p:sp>
+      <p:sp>
+        <p:nvSpPr>
+          <p:cNvPr id="41" name="TextBox 40"/>
+          <p:cNvSpPr txBox="1"/>
+          <p:nvPr/>
+        </p:nvSpPr>
+        <p:spPr>
+          <a:xfrm>
+            <a:off x="8677656" y="3749039"/>
+            <a:ext cx="3081528" cy="457200"/>
+          </a:xfrm>
+          <a:prstGeom prst="rect">
+            <a:avLst/>
+          </a:prstGeom>
+          <a:noFill/>
+        </p:spPr>
+        <p:txBody>
+          <a:bodyPr wrap="square" lIns="18288" rIns="18288" tIns="9144" bIns="0">
+            <a:spAutoFit/>
+          </a:bodyPr>
+          <a:lstStyle/>
+          <a:p>
+            <a:pPr>
+              <a:defRPr sz="1230" b="0">
+                <a:solidFill>
+                  <a:srgbClr val="17221F"/>
+                </a:solidFill>
+                <a:latin typeface="Inter"/>
+              </a:defRPr>
+            </a:pPr>
+            <a:r>
+              <a:t>Variantes couleur / style / coupe</a:t>
+            </a:r>
+          </a:p>
+        </p:txBody>
+      </p:sp>
+      <p:sp>
+        <p:nvSpPr>
+          <p:cNvPr id="42" name="Rounded Rectangle 41"/>
+          <p:cNvSpPr/>
+          <p:nvPr/>
+        </p:nvSpPr>
+        <p:spPr>
+          <a:xfrm>
+            <a:off x="8467344" y="4320540"/>
+            <a:ext cx="100584" cy="100584"/>
+          </a:xfrm>
+          <a:prstGeom prst="roundRect">
+            <a:avLst/>
+          </a:prstGeom>
+          <a:solidFill>
+            <a:srgbClr val="416954"/>
+          </a:solidFill>
+          <a:ln>
+            <a:noFill/>
+          </a:ln>
+        </p:spPr>
+        <p:style>
+          <a:lnRef idx="1">
+            <a:schemeClr val="accent1"/>
+          </a:lnRef>
+          <a:fillRef idx="3">
+            <a:schemeClr val="accent1"/>
+          </a:fillRef>
+          <a:effectRef idx="2">
+            <a:schemeClr val="accent1"/>
+          </a:effectRef>
+          <a:fontRef idx="minor">
+            <a:schemeClr val="lt1"/>
+          </a:fontRef>
+        </p:style>
+        <p:txBody>
+          <a:bodyPr rtlCol="0" anchor="ctr"/>
+          <a:lstStyle/>
+          <a:p>
+            <a:pPr algn="ctr"/>
+          </a:p>
+        </p:txBody>
+      </p:sp>
+      <p:sp>
+        <p:nvSpPr>
+          <p:cNvPr id="43" name="TextBox 42"/>
+          <p:cNvSpPr txBox="1"/>
+          <p:nvPr/>
+        </p:nvSpPr>
+        <p:spPr>
+          <a:xfrm>
+            <a:off x="8677656" y="4279392"/>
+            <a:ext cx="3081528" cy="457200"/>
+          </a:xfrm>
+          <a:prstGeom prst="rect">
+            <a:avLst/>
+          </a:prstGeom>
+          <a:noFill/>
+        </p:spPr>
+        <p:txBody>
+          <a:bodyPr wrap="square" lIns="18288" rIns="18288" tIns="9144" bIns="0">
+            <a:spAutoFit/>
+          </a:bodyPr>
+          <a:lstStyle/>
+          <a:p>
+            <a:pPr>
+              <a:defRPr sz="1230" b="0">
+                <a:solidFill>
+                  <a:srgbClr val="17221F"/>
+                </a:solidFill>
+                <a:latin typeface="Inter"/>
+              </a:defRPr>
+            </a:pPr>
+            <a:r>
+              <a:t>Blogs, influenceurs, tendances</a:t>
+            </a:r>
+          </a:p>
+        </p:txBody>
+      </p:sp>
+      <p:sp>
+        <p:nvSpPr>
+          <p:cNvPr id="44" name="TextBox 43"/>
+          <p:cNvSpPr txBox="1"/>
+          <p:nvPr/>
+        </p:nvSpPr>
+        <p:spPr>
+          <a:xfrm>
+            <a:off x="8476488" y="4910328"/>
+            <a:ext cx="3246120" cy="320040"/>
+          </a:xfrm>
+          <a:prstGeom prst="rect">
+            <a:avLst/>
+          </a:prstGeom>
+          <a:noFill/>
+        </p:spPr>
+        <p:txBody>
+          <a:bodyPr wrap="square" lIns="18288" rIns="18288" tIns="9144" bIns="0">
+            <a:spAutoFit/>
+          </a:bodyPr>
+          <a:lstStyle/>
+          <a:p>
+            <a:pPr>
+              <a:defRPr sz="1000" b="1">
+                <a:solidFill>
+                  <a:srgbClr val="607069"/>
+                </a:solidFill>
+                <a:latin typeface="Inter"/>
+              </a:defRPr>
+            </a:pPr>
+            <a:r>
+              <a:t>Pas dans le coût central Data/IA</a:t>
+            </a:r>
+          </a:p>
+        </p:txBody>
+      </p:sp>
+      <p:sp>
+        <p:nvSpPr>
+          <p:cNvPr id="45" name="Rounded Rectangle 44"/>
+          <p:cNvSpPr/>
+          <p:nvPr/>
+        </p:nvSpPr>
+        <p:spPr>
+          <a:xfrm>
+            <a:off x="667512" y="5596128"/>
+            <a:ext cx="10863072" cy="539496"/>
+          </a:xfrm>
+          <a:prstGeom prst="roundRect">
+            <a:avLst/>
+          </a:prstGeom>
+          <a:solidFill>
+            <a:srgbClr val="17221F"/>
+          </a:solidFill>
+          <a:ln>
+            <a:noFill/>
+          </a:ln>
+        </p:spPr>
+        <p:style>
+          <a:lnRef idx="1">
+            <a:schemeClr val="accent1"/>
+          </a:lnRef>
+          <a:fillRef idx="3">
+            <a:schemeClr val="accent1"/>
+          </a:fillRef>
+          <a:effectRef idx="2">
+            <a:schemeClr val="accent1"/>
+          </a:effectRef>
+          <a:fontRef idx="minor">
+            <a:schemeClr val="lt1"/>
+          </a:fontRef>
+        </p:style>
+        <p:txBody>
+          <a:bodyPr rtlCol="0" anchor="ctr"/>
+          <a:lstStyle/>
+          <a:p>
+            <a:pPr algn="ctr"/>
+          </a:p>
+        </p:txBody>
+      </p:sp>
+      <p:sp>
+        <p:nvSpPr>
+          <p:cNvPr id="46" name="TextBox 45"/>
+          <p:cNvSpPr txBox="1"/>
+          <p:nvPr/>
+        </p:nvSpPr>
+        <p:spPr>
+          <a:xfrm>
+            <a:off x="859536" y="5733288"/>
+            <a:ext cx="10479024" cy="292608"/>
+          </a:xfrm>
+          <a:prstGeom prst="rect">
+            <a:avLst/>
+          </a:prstGeom>
+          <a:noFill/>
+        </p:spPr>
+        <p:txBody>
+          <a:bodyPr wrap="square" lIns="18288" rIns="18288" tIns="9144" bIns="0">
+            <a:spAutoFit/>
+          </a:bodyPr>
+          <a:lstStyle/>
+          <a:p>
+            <a:pPr>
+              <a:defRPr sz="1130" b="0">
+                <a:solidFill>
+                  <a:srgbClr val="FFFFFF"/>
+                </a:solidFill>
+                <a:latin typeface="Inter"/>
+              </a:defRPr>
+            </a:pPr>
+            <a:r>
+              <a:t>TRANSVERSE · Consentement, accès et désinscription · rectification / suppression · conservation · purge automatique (RGPD / DPO).</a:t>
+            </a:r>
           </a:p>
         </p:txBody>
       </p:sp>
@@ -30986,6 +34893,42 @@
               <a:t>Ce sont des prévisions commerciales, pas des résultats que le PoC prétend démontrer.</a:t>
             </a:r>
             <a:endParaRPr lang="en-US" sz="1300" dirty="0"/>
+          </a:p>
+        </p:txBody>
+      </p:sp>
+      <p:sp>
+        <p:nvSpPr>
+          <p:cNvPr id="23" name="TextBox 22"/>
+          <p:cNvSpPr txBox="1"/>
+          <p:nvPr/>
+        </p:nvSpPr>
+        <p:spPr>
+          <a:xfrm>
+            <a:off x="914400" y="5129784"/>
+            <a:ext cx="10698480" cy="182880"/>
+          </a:xfrm>
+          <a:prstGeom prst="rect">
+            <a:avLst/>
+          </a:prstGeom>
+          <a:noFill/>
+        </p:spPr>
+        <p:txBody>
+          <a:bodyPr wrap="square" lIns="18288" rIns="18288" tIns="9144" bIns="0">
+            <a:spAutoFit/>
+          </a:bodyPr>
+          <a:lstStyle/>
+          <a:p>
+            <a:pPr>
+              <a:defRPr sz="1120" b="1">
+                <a:solidFill>
+                  <a:srgbClr val="17221F"/>
+                </a:solidFill>
+                <a:latin typeface="Inter"/>
+              </a:defRPr>
+            </a:pPr>
+            <a:r>
+              <a:t>11 magasins   ·   950 000 visiteurs web uniques/an   ·   875 références / 9 catégories</a:t>
+            </a:r>
           </a:p>
         </p:txBody>
       </p:sp>
